--- a/comprehensive-practice-ai/做中学与综合实践活动.pptx
+++ b/comprehensive-practice-ai/做中学与综合实践活动.pptx
@@ -630,7 +630,7 @@
           <a:p>
             <a:r>
               <a:rPr lang="en-US" dirty="0"/>
-              <a:t>必须讲明两份都是虚构的，不用真实学生作业。揭晓的落点不是嘲笑 AI 写得假，恰恰相反，乙写得比甲好，按纸面标准该给乙高分。问题在于评的是纸面。这就把成果不可信这件事从断言变成了台下刚刚亲历的判断。</a:t>
+              <a:t>必须讲明两份都是虚构的，不用真实学生作业。揭晓的落点不在嘲笑 AI 写得假。乙写得比甲好，按纸面标准该给乙高分，问题在于评的是纸面。成果不可信这件事，到这里就从一句断言变成了台下刚刚亲历的判断。</a:t>
             </a:r>
             <a:endParaRPr lang="en-US" dirty="0"/>
           </a:p>
@@ -806,7 +806,7 @@
           <a:p>
             <a:r>
               <a:rPr lang="en-US" dirty="0"/>
-              <a:t>这一页是本场唯一一个需要把两条线索接起来的地方，讲慢。第一段说社会服务与职业体验是做中学的缺口，也就是综合实践老师的专业位置；刚才那张图说这两种方式受 AI 冲击最轻，因为身体必须在场。两件事叠起来的结论是：你们的专业位置，恰好也是最不容易被替代的位置。这句话对台下是实的，不是安慰。</a:t>
+              <a:t>这一页是本场唯一一个需要把两条线索接起来的地方，讲慢。第一段说社会服务与职业体验是做中学的缺口，也就是综合实践老师的专业位置；刚才那张图说这两种方式受 AI 冲击最轻，因为身体必须在场。两件事叠起来的结论是：综合实践教师的专业位置，恰好也是最不容易被替代的位置。这个结论对台下是实的，不用当成安慰话讲。</a:t>
             </a:r>
             <a:endParaRPr lang="en-US" dirty="0"/>
           </a:p>
@@ -1070,7 +1070,7 @@
           <a:p>
             <a:r>
               <a:rPr lang="en-US" dirty="0"/>
-              <a:t>只用这一组数据，不要再加第二组。多讲会让台下感到被指责，而这一段需要的只是把真问题这件事坐实。最后那句话一定要说出来：这是全国普遍现象，不是深圳的问题。B 档页，60 分钟版删。</a:t>
+              <a:t>只用这一组数据，不要再加第二组。多讲会让台下感到被指责，而这一段需要的只是把真问题这件事坐实。最后那句话要说出来：这是全国普遍现象，不是深圳的问题。B 档页，60 分钟版删。</a:t>
             </a:r>
             <a:endParaRPr lang="en-US" dirty="0"/>
           </a:p>
@@ -1158,7 +1158,7 @@
           <a:p>
             <a:r>
               <a:rPr lang="en-US" dirty="0"/>
-              <a:t>全场第一张表。三列念完就停，不要点破规律。规律是：左列全在学生侧，中列全在教师侧。留给老师自己看出来，到第 19 页再收。第三列是这场讲座可信度的来源之一，要念得实：AI 解决不了课时被挤占，解决不了师资兼任，解决不了基地质量，也替不了综评的公示签字。谁说 AI 能解决这些，谁在卖东西。</a:t>
+              <a:t>全场第一张表。三列念完就停，不要点破规律。规律是：左列全在学生侧，中列全在教师侧。留给老师自己看出来，到第 19 页再收。第三列是这场讲座可信度的来源之一，要念得实：AI 解决不了课时被挤占，解决不了师资兼任，解决不了基地质量，也替不了综评的公示签字。说 AI 能解决这三件事的，多半是在卖东西。</a:t>
             </a:r>
             <a:endParaRPr lang="en-US" dirty="0"/>
           </a:p>
@@ -1598,7 +1598,7 @@
           <a:p>
             <a:r>
               <a:rPr lang="en-US" dirty="0"/>
-              <a:t>这是老师今天要带走的第一样东西。三问的顺序不能调：先想能力，再看替代，最后才谈补救。多数人是倒着想的，先看工具能干什么，再倒推该不该用，那样一定会用过头。</a:t>
+              <a:t>这是老师今天要带走的第一样东西。三问的顺序不能调：先想能力，再看替代，最后才谈补救。多数人是倒着想的，先看工具能干什么，再倒推该不该用，那样容易用过头。</a:t>
             </a:r>
             <a:endParaRPr lang="en-US" dirty="0"/>
           </a:p>
@@ -3006,7 +3006,7 @@
           <a:p>
             <a:r>
               <a:rPr lang="en-US" dirty="0"/>
-              <a:t>这是老师要带走的第二样东西，也是最便宜的一样。三问问的都是过程，不问结论，所以背不出来。第三问最狠：答不上来说明他没验证过，那这份成果就是拿来的。如果今天只能记住一件事，记这三问。</a:t>
+              <a:t>这是老师要带走的第二样东西，也是最便宜的一样。三问问的都是过程，不问结论，所以背不出来。第三问答不上来，说明他没验证过，这份成果就是拿来的。如果今天只能记住一件事，记这三问。</a:t>
             </a:r>
             <a:endParaRPr lang="en-US" dirty="0"/>
           </a:p>
@@ -3094,7 +3094,7 @@
           <a:p>
             <a:r>
               <a:rPr lang="en-US" dirty="0"/>
-              <a:t>这条链说明的是：过程证据不是给我自己看的，它有制度出口。2017 纲要对档案袋的要求是事实材料要真实、有据可查，指南要求纳入综合素质评价档案。所以留痕这件事不是多做的功课，是这条链的入口。深圳那一句要念准，写实记录须有佐证材料、签字、公示，不要说成 AI 素养已经纳入综合素质评价，教育部、广东、深圳的文件都是鼓励探索，只能说对接或探索纳入。B 档页。</a:t>
+              <a:t>这条链说明的是：过程证据不是给我自己看的，它有制度出口。2017 纲要对档案袋的要求是事实材料要真实、有据可查，指南要求纳入综合素质评价档案。所以留痕是这条链的入口，不是额外多出来的功课。深圳那一句要念准，写实记录须有佐证材料、签字、公示，不要说成 AI 素养已经纳入综合素质评价，教育部、广东、深圳的文件都是鼓励探索，只能说对接或探索纳入。B 档页。</a:t>
             </a:r>
             <a:endParaRPr lang="en-US" dirty="0"/>
           </a:p>
@@ -3270,7 +3270,7 @@
           <a:p>
             <a:r>
               <a:rPr lang="en-US" dirty="0"/>
-              <a:t>指南列的评价主体就是这四类，里面没有 AI。用 AI 自动批阅探究日志、自动生成评语并直接进档案，超出了这份文件授权的范围。这一页是给老师的保护，不是限制：出了问题，签字的人担责，那么判断权也必须在签字的人手上。B 档页。</a:t>
+              <a:t>指南列的评价主体就是这四类，里面没有 AI。用 AI 自动批阅探究日志、自动生成评语并直接进档案，超出了这份文件授权的范围。这一页保护的是老师。出了问题，签字的人担责，判断权也就必须留在签字的人手上。B 档页。</a:t>
             </a:r>
             <a:endParaRPr lang="en-US" dirty="0"/>
           </a:p>
@@ -3622,7 +3622,7 @@
           <a:p>
             <a:r>
               <a:rPr lang="en-US" dirty="0"/>
-              <a:t>末页停留时间长一点，让要拍照的人拍完。三条说明都要念，尤其第三条：把自己的判断和政策规定分开，这是这场讲座可信度的最后一道保障。</a:t>
+              <a:t>末页停留时间长一点，让要拍照的人拍完。三条说明都要念，尤其第三条。把自己的判断和政策规定分开，这一条不能省。</a:t>
             </a:r>
             <a:endParaRPr lang="en-US" dirty="0"/>
           </a:p>
@@ -3886,7 +3886,7 @@
           <a:p>
             <a:r>
               <a:rPr lang="en-US" dirty="0"/>
-              <a:t>这一页是全场的支点，慢讲。做中学是这门课探究与物化那半边，做了加密与提标。它没有覆盖社会服务与职业体验，对责任担当的处理停在态度表述上，没有要求学生对他人或社区做任何事；价值体认走的是主题绑定的路径，与 2017 纲要从个体生活、社会生活及与大自然的接触中获得体验的路径不同。这个判断的意义在于：这不是外来入侵，是自家课程的一个子集被单独拎出来提了要求。台下的抵触情绪主要在这一页化解。</a:t>
+              <a:t>这一页是全场的支点，慢讲。做中学是这门课探究与物化那半边，做了加密与提标。它没有覆盖社会服务与职业体验，对责任担当的处理停在态度表述上，没有要求学生对他人或社区做任何事；价值体认走的是主题绑定的路径，与 2017 纲要从个体生活、社会生活及与大自然的接触中获得体验的路径不同。这个判断的意义在于：做中学是自家课程的一个子集被单独拎出来提了要求，不算外来入侵。台下的抵触情绪主要在这一页化解。</a:t>
             </a:r>
             <a:endParaRPr lang="en-US" dirty="0"/>
           </a:p>
@@ -5671,7 +5671,7 @@
                 <a:ea typeface="Microsoft YaHei" pitchFamily="34" charset="-122"/>
                 <a:cs typeface="Microsoft YaHei" pitchFamily="34" charset="-120"/>
               </a:rPr>
-              <a:t>真正的差别不在文本里：甲的作者数过那六个位置，乙的作者没有。</a:t>
+              <a:t>差别不在文本里：甲的作者数过那六个位置，乙的作者没有。</a:t>
             </a:r>
             <a:endParaRPr lang="en-US" sz="2100" dirty="0"/>
           </a:p>
@@ -12160,7 +12160,7 @@
                 <a:ea typeface="Microsoft YaHei" pitchFamily="34" charset="-122"/>
                 <a:cs typeface="Microsoft YaHei" pitchFamily="34" charset="-120"/>
               </a:rPr>
-              <a:t>不是「能不能用 AI」，是「这一步的困难，是不是这门课要学生经历的困难」。</a:t>
+              <a:t>只有一条：这一步的困难，是不是这门课要学生经历的困难。</a:t>
             </a:r>
             <a:endParaRPr lang="en-US" sz="3000" dirty="0"/>
           </a:p>

--- a/comprehensive-practice-ai/做中学与综合实践活动.pptx
+++ b/comprehensive-practice-ai/做中学与综合实践活动.pptx
@@ -2654,7 +2654,7 @@
           <a:p>
             <a:r>
               <a:rPr lang="en-US" dirty="0"/>
-              <a:t>各一分钟带过，不展开。作用是说明刻度不是一刀切：低年级的生态调查可以整个任务学生不碰设备，初中的工程探究可以两端都开。决定刻度的是任务里哪一步是要学生经历的困难，不是学段，也不是主题。B 档页。</a:t>
+              <a:t>各一分钟带过，不展开。作用是说明刻度不是一刀切：低年级的生物多样性调查可以整个任务学生不碰设备，初中的工程探究可以两端都开。决定刻度的是任务里哪一步是要学生经历的困难，不是学段，也不是主题。B 档页。</a:t>
             </a:r>
             <a:endParaRPr lang="en-US" dirty="0"/>
           </a:p>
@@ -26157,13 +26157,52 @@
       </p:sp>
       <p:sp>
         <p:nvSpPr>
-          <p:cNvPr id="6" name="Shape 4"/>
-          <p:cNvSpPr/>
-          <p:nvPr/>
-        </p:nvSpPr>
-        <p:spPr>
-          <a:xfrm>
-            <a:off x="685800" y="5029200"/>
+          <p:cNvPr id="6" name="Text 4"/>
+          <p:cNvSpPr/>
+          <p:nvPr/>
+        </p:nvSpPr>
+        <p:spPr>
+          <a:xfrm>
+            <a:off x="685800" y="4846320"/>
+            <a:ext cx="10820095" cy="320040"/>
+          </a:xfrm>
+          <a:prstGeom prst="rect">
+            <a:avLst/>
+          </a:prstGeom>
+          <a:noFill/>
+          <a:ln/>
+        </p:spPr>
+        <p:txBody>
+          <a:bodyPr wrap="square" lIns="0" tIns="0" rIns="0" bIns="0" rtlCol="0" anchor="ctr"/>
+          <a:lstStyle/>
+          <a:p>
+            <a:pPr indent="0" marL="0">
+              <a:buNone/>
+            </a:pPr>
+            <a:r>
+              <a:rPr lang="en-US" sz="1600" dirty="0">
+                <a:solidFill>
+                  <a:srgbClr val="1A2029"/>
+                </a:solidFill>
+                <a:latin typeface="Microsoft YaHei" pitchFamily="34" charset="0"/>
+                <a:ea typeface="Microsoft YaHei" pitchFamily="34" charset="-122"/>
+                <a:cs typeface="Microsoft YaHei" pitchFamily="34" charset="-120"/>
+              </a:rPr>
+              <a:t>辛海洋　2026 年 8 月 21 日　深圳</a:t>
+            </a:r>
+            <a:endParaRPr lang="en-US" sz="1600" dirty="0"/>
+          </a:p>
+        </p:txBody>
+      </p:sp>
+      <p:sp>
+        <p:nvSpPr>
+          <p:cNvPr id="7" name="Shape 5"/>
+          <p:cNvSpPr/>
+          <p:nvPr/>
+        </p:nvSpPr>
+        <p:spPr>
+          <a:xfrm>
+            <a:off x="685800" y="5349240"/>
             <a:ext cx="3840480" cy="502920"/>
           </a:xfrm>
           <a:prstGeom prst="rect">
@@ -26182,13 +26221,13 @@
       </p:sp>
       <p:sp>
         <p:nvSpPr>
-          <p:cNvPr id="7" name="Text 5"/>
-          <p:cNvSpPr/>
-          <p:nvPr/>
-        </p:nvSpPr>
-        <p:spPr>
-          <a:xfrm>
-            <a:off x="685800" y="5029200"/>
+          <p:cNvPr id="8" name="Text 6"/>
+          <p:cNvSpPr/>
+          <p:nvPr/>
+        </p:nvSpPr>
+        <p:spPr>
+          <a:xfrm>
+            <a:off x="685800" y="5349240"/>
             <a:ext cx="3840480" cy="502920"/>
           </a:xfrm>
           <a:prstGeom prst="rect">

--- a/comprehensive-practice-ai/做中学与综合实践活动.pptx
+++ b/comprehensive-practice-ai/做中学与综合实践活动.pptx
@@ -542,7 +542,7 @@
           <a:p>
             <a:r>
               <a:rPr lang="en-US" dirty="0"/>
-              <a:t>开场不出现 AI。这一段只交代一件事实：有一份文件，九月落地。整段八分钟，节奏放慢，让台下先坐定。</a:t>
+              <a:t>本段不涉及 AI。内容限于一项事实：该文件已经印发，九月起实施。八分钟，节奏放缓，让听众先建立背景。</a:t>
             </a:r>
             <a:endParaRPr lang="en-US" dirty="0"/>
           </a:p>
@@ -630,7 +630,7 @@
           <a:p>
             <a:r>
               <a:rPr lang="en-US" dirty="0"/>
-              <a:t>必须讲明两份都是虚构的，不用真实学生作业。揭晓的落点不在嘲笑 AI 写得假。乙写得比甲好，按纸面标准该给乙高分，问题在于评的是纸面。成果不可信这件事，到这里就从一句断言变成了台下刚刚亲历的判断。</a:t>
+              <a:t>须说明两份均为虚构，未使用真实学生作业。揭晓的落点不在指出 AI 文本的破绽。乙的文本质量高于甲，按纸面标准应当给乙更高分数，问题在于评价对象是纸面。成果可替代性至此由一项断言转为听众刚刚经历的判断。</a:t>
             </a:r>
             <a:endParaRPr lang="en-US" dirty="0"/>
           </a:p>
@@ -718,7 +718,7 @@
           <a:p>
             <a:r>
               <a:rPr lang="en-US" dirty="0"/>
-              <a:t>讲排序的理由，不要讲成结论。考察探究受冲击最重，因为它的全部产出都是文本。设计制作次之，因为实物还要动手，但设计方案这一步已经不稀缺。社会服务与职业体验最轻，理由只有一条：身体必须在场，AI 替不了学生站到社区居民面前。页脚那句话要主动说出来，这是判断不是数据，台下有懂研究的人会问。</a:t>
+              <a:t>说明排序的依据，不作为结论陈述。考察探究受影响最重，因其全部产出均为文本；设计制作次之，实物仍需动手，但方案设计一步已不稀缺；社会服务与职业体验最轻，依据只有一条，即身体必须在场。页脚的说明须主动讲出，此处是判断而非测量数据，听众中有研究背景者会追问。</a:t>
             </a:r>
             <a:endParaRPr lang="en-US" dirty="0"/>
           </a:p>
@@ -806,7 +806,7 @@
           <a:p>
             <a:r>
               <a:rPr lang="en-US" dirty="0"/>
-              <a:t>这一页是本场唯一一个需要把两条线索接起来的地方，讲慢。第一段说社会服务与职业体验是做中学的缺口，也就是综合实践老师的专业位置；刚才那张图说这两种方式受 AI 冲击最轻，因为身体必须在场。两件事叠起来的结论是：综合实践教师的专业位置，恰好也是最不容易被替代的位置。这个结论对台下是实的，不用当成安慰话讲。</a:t>
+              <a:t>本页需要把两条线索接起来，放缓。第一段指出社会服务与职业体验是做中学的覆盖缺口，也是综合实践活动教师的专业位置；上一页指出这两种方式受生成式 AI 影响最轻，依据是身体必须在场。两者叠加的结论是：教师的专业位置与最不易被替代的位置重合。该结论有依据，不作安慰性表述。</a:t>
             </a:r>
             <a:endParaRPr lang="en-US" dirty="0"/>
           </a:p>
@@ -894,7 +894,7 @@
           <a:p>
             <a:r>
               <a:rPr lang="en-US" dirty="0"/>
-              <a:t>过渡页，一分钟带过。不要在这里展开，展开的地方在第三段。</a:t>
+              <a:t>过渡页，一分钟。不在此展开，展开在第三段。</a:t>
             </a:r>
             <a:endParaRPr lang="en-US" dirty="0"/>
           </a:p>
@@ -982,7 +982,7 @@
           <a:p>
             <a:r>
               <a:rPr lang="en-US" dirty="0"/>
-              <a:t>念，不评论。这六条台下比我熟，念的时候慢一点，让他们在心里对号。不要加一句这些问题很严重之类的话，念完直接进下一页。这一段的作用是先把公认的事实摆齐，再谈 AI 会往哪边推。</a:t>
+              <a:t>宣读，不作评论。这六条听众比讲者熟悉，宣读时放缓，留出对照的时间，不附加评价性表述。本段的作用是先陈列公认事实，再讨论生成式 AI 的作用方向。</a:t>
             </a:r>
             <a:endParaRPr lang="en-US" dirty="0"/>
           </a:p>
@@ -1070,7 +1070,7 @@
           <a:p>
             <a:r>
               <a:rPr lang="en-US" dirty="0"/>
-              <a:t>只用这一组数据，不要再加第二组。多讲会让台下感到被指责，而这一段需要的只是把真问题这件事坐实。最后那句话要说出来：这是全国普遍现象，不是深圳的问题。B 档页，60 分钟版删。</a:t>
+              <a:t>只用这一组数据。补充第二组会使听众产生被指责感，而本段所需的只是确认问题的真实性。末句须讲出：该状况属全国范围的普遍现象。本页属 B 档，60 分钟版删除。</a:t>
             </a:r>
             <a:endParaRPr lang="en-US" dirty="0"/>
           </a:p>
@@ -1158,7 +1158,7 @@
           <a:p>
             <a:r>
               <a:rPr lang="en-US" dirty="0"/>
-              <a:t>全场第一张表。三列念完就停，不要点破规律。规律是：左列全在学生侧，中列全在教师侧。留给老师自己看出来，到第 19 页再收。第三列是这场讲座可信度的来源之一，要念得实：AI 解决不了课时被挤占，解决不了师资兼任，解决不了基地质量，也替不了综评的公示签字。说 AI 能解决这三件事的，多半是在卖东西。</a:t>
+              <a:t>全场第一张表。三列宣读完毕即停，不点破规律。规律是左列均属学生侧，中列均属教师侧，留待听众自行发现，第 19 页收束。第三列是本场可信度的来源之一，须如实陈述：生成式 AI 不能解决课时挤占，不能解决师资兼任，不能解决基地质量，也不能替代综合素质评价的公示与签字程序。</a:t>
             </a:r>
             <a:endParaRPr lang="en-US" dirty="0"/>
           </a:p>
@@ -1246,7 +1246,7 @@
           <a:p>
             <a:r>
               <a:rPr lang="en-US" dirty="0"/>
-              <a:t>这三个词是夏雪梅团队的反面清单，出处是 2022 年国家级教学成果一等奖，讲的时候把出处带上，台下有人会记下来去查。落点是最后那句：空心项目原本还看得出来空，因为成果糙；AI 一进来，成果不糙了，空就藏住了。</a:t>
+              <a:t>这三个名称出自夏雪梅团队的反面清单，出处为 2022 年国家级教学成果一等奖，讲述时须带出出处。落点在末句：空心项目原本可以从成果的粗糙程度识别，生成式 AI 提高完成度之后，这一识别线索消失。</a:t>
             </a:r>
             <a:endParaRPr lang="en-US" dirty="0"/>
           </a:p>
@@ -1334,7 +1334,7 @@
           <a:p>
             <a:r>
               <a:rPr lang="en-US" dirty="0"/>
-              <a:t>这一页是全场可信度的支点，不能省，也不能夸大。先讲设计再讲结果，顺序不要颠倒。要主动说样本是大学生，中小学不能直接套数值，但机制一样：AI 把产出做好了，学生跳过了产生那个产出所需要的思考。边界条件那两条也要讲：国内两项元分析一致显示，干预时间长、样本量大的时候效应会转负或不显著，这提示很多宣传依据的是小规模短周期的演示效应。B 档页，60 分钟版删掉，但这条证据要留在口袋里，有人质疑时口头拿出来。</a:t>
+              <a:t>本页是全场可信度的支点，不可省略，亦不可夸大。先陈述研究设计，再陈述结果，顺序不可颠倒。须主动说明样本为大学生，中小学不可直接套用其数值，但机制一致：生成式 AI 完成了产出，学生跳过了形成该产出所需的思考。边界条件两条亦须讲出，国内两项元分析一致显示，干预时间较长或样本量较大时效应量转为负向或不显著，提示相当一部分宣传依据的是小规模短周期的演示效应。本页属 B 档，60 分钟版删除，但该证据须备于口头，遇质疑时使用。</a:t>
             </a:r>
             <a:endParaRPr lang="en-US" dirty="0"/>
           </a:p>
@@ -1422,7 +1422,7 @@
           <a:p>
             <a:r>
               <a:rPr lang="en-US" dirty="0"/>
-              <a:t>整屏一句。说完停。这里可以把三分表的规律点破了：刚才那张表，左边一列全是学生侧的事，右边一列全是教师侧的事。AI 用在教师身上是减负，用在学生身上是替他把课上了。</a:t>
+              <a:t>整屏一句，陈述后停顿。此处可以点破三分表的规律：左列均为学生侧事项，中列均为教师侧事项。生成式 AI 用于教师侧是减负，用于学生侧则替代了学生本应完成的学习。</a:t>
             </a:r>
             <a:endParaRPr lang="en-US" dirty="0"/>
           </a:p>
@@ -1510,7 +1510,7 @@
           <a:p>
             <a:r>
               <a:rPr lang="en-US" dirty="0"/>
-              <a:t>先念文件名、文号、日期，再念人民日报那一句。不评论，不引申。台下多数人还没听说过这份文件，给他们时间把名字记住。做中学不是新词，2001 年教育部与中国科协共同发起过做中学科学教育改革工作，这句话对老教师能省很多解释成本，口头带一句即可。</a:t>
+              <a:t>依次陈述文件名称、文号与印发日期，再引人民日报的报道，不作评论。多数听众尚未接触过这份文件，需要留出记住名称的时间。做中学并非新提法，2001 年教育部与中国科协曾共同发起做中学科学教育改革工作，对资深教师口头补充一句可以节省解释成本。</a:t>
             </a:r>
             <a:endParaRPr lang="en-US" dirty="0"/>
           </a:p>
@@ -1598,7 +1598,7 @@
           <a:p>
             <a:r>
               <a:rPr lang="en-US" dirty="0"/>
-              <a:t>这是老师今天要带走的第一样东西。三问的顺序不能调：先想能力，再看替代，最后才谈补救。多数人是倒着想的，先看工具能干什么，再倒推该不该用，那样容易用过头。</a:t>
+              <a:t>听众要带走的第一项工具。三项判断的顺序不可调换：先确认能力，再判断替代关系，最后讨论补偿。多数人的顺序相反，先看工具功能再倒推是否使用，该顺序容易导致使用过度。</a:t>
             </a:r>
             <a:endParaRPr lang="en-US" dirty="0"/>
           </a:p>
@@ -1686,7 +1686,7 @@
           <a:p>
             <a:r>
               <a:rPr lang="en-US" dirty="0"/>
-              <a:t>一句话页。这句话是三问的压缩版，讲完停一下。指南写了鼓励学生大胆尝试，包容失败，在面对具有不确定性的问题时，通过不断试错、反思、改进等，寻求问题解决方案，体验科学探索的曲折过程。这门课的教学资产就是试错空间，而生成式 AI 的默认行为是把试错空间关掉。B 档页。</a:t>
+              <a:t>一句话页。该句是三项判断的压缩形式，陈述后停顿。指南写明鼓励学生大胆尝试，包容失败，在面对具有不确定性的问题时，通过不断试错、反思、改进等，寻求问题解决方案，体验科学探索的曲折过程。本课程的教学资产即试错空间，而生成式 AI 的默认行为是消除试错空间。本页属 B 档。</a:t>
             </a:r>
             <a:endParaRPr lang="en-US" dirty="0"/>
           </a:p>
@@ -1774,7 +1774,7 @@
           <a:p>
             <a:r>
               <a:rPr lang="en-US" dirty="0"/>
-              <a:t>带走物。告诉老师这一页会随讲义发，或者自己照着画一张也行，格子不重要，三个问题重要。下一段用生命健康的两个任务把这张表当场填一遍，填完这张表就有样子了。</a:t>
+              <a:t>本页是听众要带走的工具。说明该表将随讲义发放，教师亦可自行绘制，格式不重要，三项判断是重点。下一段以生命健康的两项任务当场填写一遍。</a:t>
             </a:r>
             <a:endParaRPr lang="en-US" dirty="0"/>
           </a:p>
@@ -1862,7 +1862,7 @@
           <a:p>
             <a:r>
               <a:rPr lang="en-US" dirty="0"/>
-              <a:t>这一页给形状，下一段用案例把形状填实。要讲准两件事：一是内核指的是六个环节这条主干，外圈指的是任务前的背景检索和任务后的表达传播，不是六个环节内部两端放；二是六个环节自己的走势是前紧后松，越往后越可以放。反直觉那句要停一下，台下多半心里想的正是让 AI 帮忙出主意。解释一句：想点子这一步产生的是问题意识，而问题意识是四个评价维度里唯一只能从这一步来的东西，替掉就没有别的地方补。这个收放配置是依据评价维度推演出来的专业主张，指南只写了辅助两个字，讲的时候要说成建议，不冒充政策要求。</a:t>
+              <a:t>本页给出配置形态，下一段以案例填实。两点须讲准：其一，内核指六个环节这条主干，外圈指任务前的背景检索与任务后的表达传播，并非六个环节内部的两端；其二，六个环节自身呈前紧后松，越靠后越可以放开。反直觉一句需要停顿，听众多数正持相反预期。补充说明：选题环节产生的评价证据是问题意识，而问题意识在四个评价维度中仅此一个来源，替代后无从补偿。该收放配置系依据评价维度推演的专业判断，指南原文仅有辅助二字，讲述时须表述为建议，不得冒充政策要求。</a:t>
             </a:r>
             <a:endParaRPr lang="en-US" dirty="0"/>
           </a:p>
@@ -1950,7 +1950,7 @@
           <a:p>
             <a:r>
               <a:rPr lang="en-US" dirty="0"/>
-              <a:t>先说清楚一件事：附件任务写的是四步，指南正文要求的是六个环节，这两套不是一一对应的。接下来六页做的就是把四步摊成六个环节，顺便在每个环节上定 AI 的刻度。这个动作老师回去对着任何一个附件任务都能重做一遍。也要说清楚附件是参考不是规定动作。</a:t>
+              <a:t>先说明一项事实：附件任务写为四步，指南正文要求六个环节，两者并非一一对应。后续六页所做的即是将四步展开为六个环节，并在每个环节上确定 AI 的配置。该动作可以迁移至任何一项附件任务。亦须说明附件为参考，非规定动作。</a:t>
             </a:r>
             <a:endParaRPr lang="en-US" dirty="0"/>
           </a:p>
@@ -2038,7 +2038,7 @@
           <a:p>
             <a:r>
               <a:rPr lang="en-US" dirty="0"/>
-              <a:t>这一步产生的评价证据是问题意识，而问题意识在四个评价维度里只有这一个来源，别处补不回来。AI 的默认危害是直接给出一个可探究的问题，学生就跳过了从现象到问题的转化。所以这一步收。</a:t>
+              <a:t>本环节产生的评价证据是问题意识，而问题意识在四个评价维度中仅此一个来源，别处无从补偿。生成式 AI 的默认危害是直接给出可探究问题，学生因此跳过了从现象到问题的转化。故本环节收紧。</a:t>
             </a:r>
             <a:endParaRPr lang="en-US" dirty="0"/>
           </a:p>
@@ -2126,7 +2126,7 @@
           <a:p>
             <a:r>
               <a:rPr lang="en-US" dirty="0"/>
-              <a:t>小学学段的要求是能识别变量、制订简单的探究方案，初中学段是应用控制变量方法、制订比较完整的探究方案。差别就在这里。让 AI 挑毛病是个好用的动作：学生得先有方案才能被挑，挑完还得自己判断改不改。</a:t>
+              <a:t>小学学段的要求是识别变量、制订简单的探究方案，初中学段是应用控制变量方法、制订比较完整的探究方案，差别在此。让 AI 对方案提出质疑是可用的设计：学生须先有方案才能被质疑，质疑之后仍须自行判断是否修改。</a:t>
             </a:r>
             <a:endParaRPr lang="en-US" dirty="0"/>
           </a:p>
@@ -2214,7 +2214,7 @@
           <a:p>
             <a:r>
               <a:rPr lang="en-US" dirty="0"/>
-              <a:t>这一页有红线，要讲清楚。《中小学生成式人工智能使用指南（2025 年版）》要求学校建立工具白名单，严禁输入考试试题、个人身份信息等敏感数据。健康饮食这个任务本身就要用体质健康监测数据，所以必须在任务单上写死代号规则，不能靠学生自觉。AI 在这一步的默认危害是生成看起来合理的数据，一旦原始数据不是自己测的，后面全都不成立。</a:t>
+              <a:t>本页涉及红线，须讲清楚。《中小学生成式人工智能使用指南（2025 年版）》要求学校建立工具白名单，严禁输入考试试题、个人身份信息等敏感数据。健康饮食任务本身要使用体质健康监测数据，因此须在任务单上写明代号规则，不能依赖学生自觉。生成式 AI 在本环节的默认危害是生成表面合理的数据，原始数据一旦不是自行获得，后续全部推论均不成立。</a:t>
             </a:r>
             <a:endParaRPr lang="en-US" dirty="0"/>
           </a:p>
@@ -2302,7 +2302,7 @@
           <a:p>
             <a:r>
               <a:rPr lang="en-US" dirty="0"/>
-              <a:t>整场最该收紧的一步，比提出问题还紧。这一步产生的评价证据是反思改进能力。AI 对着一组异常数据能给出一个听上去很合理的解释，学生就不会再对它产生疑问了。指南的包容失败条款落在这里，附件任务里也反复出现如果任务完成没有达到预期效果、做好分析总结这类表述。把这句原文念出来，老师会记住。</a:t>
+              <a:t>六个环节中收得最紧的一步，紧于选题。本环节产生的评价证据是反思改进能力。生成式 AI 对一组异常数据能够给出表面合理的解释，学生因此不再对其产生疑问。指南的包容失败条款落在此处，附件任务中亦反复出现如果任务完成没有达到预期效果、做好分析总结一类表述。宣读该条原文，听众易于记住。</a:t>
             </a:r>
             <a:endParaRPr lang="en-US" dirty="0"/>
           </a:p>
@@ -2390,7 +2390,7 @@
           <a:p>
             <a:r>
               <a:rPr lang="en-US" dirty="0"/>
-              <a:t>半放的边界在于：查资料是背景工作，出设计图是替学生做决定。这一步的评价证据同时落在探究实践能力和综合实践活动的创意物化上。要强调一版不算，测试之后必须改一版，这是做中学比 2017 纲要更硬的地方。</a:t>
+              <a:t>半放的边界在于：查询资料属于背景工作，输出设计图则代替学生作出决定。本环节的评价证据同时落在探究实践能力与综合实践活动的创意物化上。须强调单一版本不构成完成，测试之后必须修改一版，这是做中学强于 2017 年纲要之处。</a:t>
             </a:r>
             <a:endParaRPr lang="en-US" dirty="0"/>
           </a:p>
@@ -2478,7 +2478,7 @@
           <a:p>
             <a:r>
               <a:rPr lang="en-US" dirty="0"/>
-              <a:t>逐字念六个环节。念完停一下，再说两句消解焦虑的话：第一，1—3 年级不另作要求，低段的老师这学期可以先不动；第二，这份文件从头到尾没有要求综合实践活动教师讲授科学原理，它要求的是学生走完这六个环节。台下最怕的是我不是科学老师讲不了，这句话要说得清楚。</a:t>
+              <a:t>逐字宣读六个环节，随后停顿。有两点需要说明：其一，1—3 年级不另作要求，低学段教师本学期可以暂不调整；其二，该文件未要求综合实践活动教师讲授科学原理，其要求是学生完整经历这六个环节。听众最关心的是学科背景问题，这一点须表述清楚。</a:t>
             </a:r>
             <a:endParaRPr lang="en-US" dirty="0"/>
           </a:p>
@@ -2566,7 +2566,7 @@
           <a:p>
             <a:r>
               <a:rPr lang="en-US" dirty="0"/>
-              <a:t>这一页是第一段那个缺口的兑现处。附件原文里健康饮食任务已经写了面向公众如社区居民开展科普宣传，这个朝外的口子是现成的，不用另外加课时。关键动作是事先约定对方给一次书面或口头答复，有回应才算服务，只展示不算。这一步也是职业体验的接口：请验光师或营养师来一次，学生带问题清单提问，而不是听讲座。</a:t>
+              <a:t>本页是第一段所述缺口的兑现处。附件原文中健康饮食任务已经写明面向公众如社区居民开展科普宣传，对外的接口是现成的，不需另加课时。关键动作是事先约定对方给出一次书面或口头答复，有回应方构成服务，仅展示不构成。本环节同时是职业体验的接口：邀请验光师或营养师到访一次，学生持问题清单访谈，而非听讲座。</a:t>
             </a:r>
             <a:endParaRPr lang="en-US" dirty="0"/>
           </a:p>
@@ -2654,7 +2654,7 @@
           <a:p>
             <a:r>
               <a:rPr lang="en-US" dirty="0"/>
-              <a:t>各一分钟带过，不展开。作用是说明刻度不是一刀切：低年级的生物多样性调查可以整个任务学生不碰设备，初中的工程探究可以两端都开。决定刻度的是任务里哪一步是要学生经历的困难，不是学段，也不是主题。B 档页。</a:t>
+              <a:t>两项各一分钟，不展开。作用是说明配置并非一刀切：低学段的生物多样性调查可以整项任务学生不使用设备，初中的工程探究可以两端都开放。决定配置的是任务中哪一步属于学生应当经历的困难，而非学段或主题。本页属 B 档。</a:t>
             </a:r>
             <a:endParaRPr lang="en-US" dirty="0"/>
           </a:p>
@@ -2742,7 +2742,7 @@
           <a:p>
             <a:r>
               <a:rPr lang="en-US" dirty="0"/>
-              <a:t>整屏一句，收第五段。说完停。这句话是六页走查的压缩，老师记住这一句就够了。</a:t>
+              <a:t>整屏一句，收束第五段，陈述后停顿。该句是六页走查的压缩形式。</a:t>
             </a:r>
             <a:endParaRPr lang="en-US" dirty="0"/>
           </a:p>
@@ -2830,7 +2830,7 @@
           <a:p>
             <a:r>
               <a:rPr lang="en-US" dirty="0"/>
-              <a:t>一句话页，接第五段的收放刻度。查重查不出 AI 写的东西，这一点台下多半已经知道。能用的办法只有两个：课时纪律，什么时候开设备什么时候不开；留痕表，用了就记下来。两个都是事前的。B 档页。</a:t>
+              <a:t>一句话页，承接第五段的配置。查重无法识别生成式 AI 的产出，听众多数已知。可用的办法只有两项：课时纪律，即规定何时开放设备；留痕表，即使用后即记录。两项均属事前设计。本页属 B 档。</a:t>
             </a:r>
             <a:endParaRPr lang="en-US" dirty="0"/>
           </a:p>
@@ -2918,7 +2918,7 @@
           <a:p>
             <a:r>
               <a:rPr lang="en-US" dirty="0"/>
-              <a:t>随任务单一起发，不要等到结题才补。要讲一个反直觉的好处：老师最怕的是过程性证据难收集，而 AI 交互天然是结构化、带时间戳、可复现的，这张表反而是四个评价维度里最容易采集的一份证据。第四栏是关键，前三栏都是记录，第四栏是判断。学生写不出第四栏，说明他没改，那本身就是评价信息。</a:t>
+              <a:t>随任务单一并发放，不在结题时补录。须说明一项反直觉的作用：教师普遍认为过程性证据难以采集，而 AI 交互本身结构化、带时间戳、可复现，该表反而是四个评价维度中最易采集的一份证据。第四栏是关键，前三栏为记录，第四栏为判断；学生无法填写第四栏，说明其未作修改，该信息本身即评价依据。</a:t>
             </a:r>
             <a:endParaRPr lang="en-US" dirty="0"/>
           </a:p>
@@ -3006,7 +3006,7 @@
           <a:p>
             <a:r>
               <a:rPr lang="en-US" dirty="0"/>
-              <a:t>这是老师要带走的第二样东西，也是最便宜的一样。三问问的都是过程，不问结论，所以背不出来。第三问答不上来，说明他没验证过，这份成果就是拿来的。如果今天只能记住一件事，记这三问。</a:t>
+              <a:t>听众要带走的第二项工具，成本最低。三项提问指向过程而非结论，无法预先背诵。第三问答不出，说明学生未作验证，该成果为外部获得。若全场只记住一项内容，即这三项提问。</a:t>
             </a:r>
             <a:endParaRPr lang="en-US" dirty="0"/>
           </a:p>
@@ -3094,7 +3094,7 @@
           <a:p>
             <a:r>
               <a:rPr lang="en-US" dirty="0"/>
-              <a:t>这条链说明的是：过程证据不是给我自己看的，它有制度出口。2017 纲要对档案袋的要求是事实材料要真实、有据可查，指南要求纳入综合素质评价档案。所以留痕是这条链的入口，不是额外多出来的功课。深圳那一句要念准，写实记录须有佐证材料、签字、公示，不要说成 AI 素养已经纳入综合素质评价，教育部、广东、深圳的文件都是鼓励探索，只能说对接或探索纳入。B 档页。</a:t>
+              <a:t>本链条说明的是过程证据具有制度出口。2017 年纲要对档案袋的要求是事实材料要真实、有据可查，指南要求纳入综合素质评价档案，留痕由此成为该链条的入口。深圳一句须宣读准确：写实记录须有佐证材料、签字与公示。不得表述为 AI 素养已纳入综合素质评价，教育部、广东省与深圳市的文件均为鼓励探索，只能表述为对接或探索纳入。本页属 B 档。</a:t>
             </a:r>
             <a:endParaRPr lang="en-US" dirty="0"/>
           </a:p>
@@ -3182,7 +3182,7 @@
           <a:p>
             <a:r>
               <a:rPr lang="en-US" dirty="0"/>
-              <a:t>四条逐条念。第一条要补一句：识别类工具属于分类判别，不属于开放式内容生成，教师在场的课堂上用不触碰小学阶段的红线，这一条要主动讲，否则老师会因为不确定而整体回避。第四条的分寸要拿准，标识办法管的是网络信息服务提供者，说成学生必须标注是拔高了，说成诚信要求就对了。初中阶段可适度探索生成内容的逻辑性分析，这一句也可以带上。</a:t>
+              <a:t>四条逐条宣读。第一条须补充：识别类工具属分类判别，不属于开放式内容生成，教师在场的课堂使用不触及小学阶段红线；此点须主动说明，否则教师会因不确定而整体回避。第四条的分寸须准确：标识办法规范的是网络信息服务提供者，表述为学生必须标注属于拔高，表述为诚信要求方为恰当。初中阶段可适度探索生成内容的逻辑性分析，此句可以一并带出。</a:t>
             </a:r>
             <a:endParaRPr lang="en-US" dirty="0"/>
           </a:p>
@@ -3270,7 +3270,7 @@
           <a:p>
             <a:r>
               <a:rPr lang="en-US" dirty="0"/>
-              <a:t>指南列的评价主体就是这四类，里面没有 AI。用 AI 自动批阅探究日志、自动生成评语并直接进档案，超出了这份文件授权的范围。这一页保护的是老师。出了问题，签字的人担责，判断权也就必须留在签字的人手上。B 档页。</a:t>
+              <a:t>指南列举的评价主体即这四类，其中没有 AI。以 AI 自动批阅探究日志、自动生成评语并直接进入档案，超出该文件的授权范围。本页的作用是保护教师：责任由签字者承担，判断权亦须留在签字者手中。本页属 B 档。</a:t>
             </a:r>
             <a:endParaRPr lang="en-US" dirty="0"/>
           </a:p>
@@ -3358,7 +3358,7 @@
           <a:p>
             <a:r>
               <a:rPr lang="en-US" dirty="0"/>
-              <a:t>全场第二张表，也是最后一张。这里讲的是工具类别，不是某个产品，老师用手上任何一款都对得上。要提醒一句：多数人做智能体的第一直觉是做答疑助手，而答疑助手正好落在提出问题和解释结论这两步，跟前面一小时讲的完全相反。要做就做一个只提问、不回答的，方案挑刺员或者答辩追问器。</a:t>
+              <a:t>全场第二张表，亦是最后一张。此处讲的是工具类别而非具体产品，教师使用任何一款均可对应。须提醒一点：多数人构建智能体的第一直觉是问答助手，而问答助手恰好落在提出问题与解释结论两个环节，与前述配置相反。可行的做法是构建只提问、不作答的工具，例如方案质疑或答辩追问。</a:t>
             </a:r>
             <a:endParaRPr lang="en-US" dirty="0"/>
           </a:p>
@@ -3446,7 +3446,7 @@
           <a:p>
             <a:r>
               <a:rPr lang="en-US" dirty="0"/>
-              <a:t>这一页是给台下建坐标，不做评论。重点提两件事：2017 纲要至今未废止，这门课的目标与活动方式仍然按它走；2022 方案把劳动和信息科技从综合实践活动里独立出去了，所以这门课现在的定位是跨学科研究性学习与社会实践。这一页是 B 档，60 分钟版删掉，直接从第 5 页开始。</a:t>
+              <a:t>本页用于建立时间坐标，不作评论。有两点需要指出：2017 年纲要至今未废止，本课程的培养目标与活动方式仍依其执行；2022 年课程方案将劳动与信息科技从综合实践活动中独立设置，本课程的现行定位为跨学科研究性学习与社会实践。本页属 B 档，60 分钟版删除，直接进入第 5 页。</a:t>
             </a:r>
             <a:endParaRPr lang="en-US" dirty="0"/>
           </a:p>
@@ -3534,7 +3534,7 @@
           <a:p>
             <a:r>
               <a:rPr lang="en-US" dirty="0"/>
-              <a:t>收尾即停，不做展望。顺序是有讲究的：先有真问题，才谈得上给方案挑刺；先有方案和挑刺记录，留痕才有东西可留。谁上来就做第二件，多半会做成答疑助手。说完这三件就结束，不要再加一段升华。</a:t>
+              <a:t>收束即止，不作展望。三项动作存在先后依赖：先有真实问题，方能对方案提出质疑；先有方案与质疑记录，留痕方有内容。直接从第二项入手者多数会做成问答助手。三项讲完即结束。</a:t>
             </a:r>
             <a:endParaRPr lang="en-US" dirty="0"/>
           </a:p>
@@ -3622,7 +3622,7 @@
           <a:p>
             <a:r>
               <a:rPr lang="en-US" dirty="0"/>
-              <a:t>末页停留时间长一点，让要拍照的人拍完。三条说明都要念，尤其第三条。把自己的判断和政策规定分开，这一条不能省。</a:t>
+              <a:t>末页停留时间稍长，供拍照。三条说明均须宣读，尤其第三条。将专业判断与政策规定分开，此条不可省略。</a:t>
             </a:r>
             <a:endParaRPr lang="en-US" dirty="0"/>
           </a:p>
@@ -3710,7 +3710,7 @@
           <a:p>
             <a:r>
               <a:rPr lang="en-US" dirty="0"/>
-              <a:t>只念，不讲定义。讲定义会掉人，而且台下比我熟。这八个词的作用是当下一页的对照基准，定义靠对比自己出来。</a:t>
+              <a:t>只作宣读，不展开定义。定义通过下一页的对比自行呈现，这八个词的作用是充当对照基准。</a:t>
             </a:r>
             <a:endParaRPr lang="en-US" dirty="0"/>
           </a:p>
@@ -3798,7 +3798,7 @@
           <a:p>
             <a:r>
               <a:rPr lang="en-US" dirty="0"/>
-              <a:t>与上一页并置着看。做中学对这门课做了两件事：加密，把探究拆成六个环节并要求走完；提标，引入识别变量、控制变量、证据推理、误差分析这些方法论要求，2017 纲要里没有写得这么硬。小学学段要求能识别变量、制订简单的探究方案，初中学段要求应用控制变量方法、制订比较完整的探究方案。</a:t>
+              <a:t>与上一页并置阅读。做中学对本课程做了两件事：其一是加密，将探究拆解为六个环节并要求完整走完；其二是提标，引入变量识别、控制变量、证据推理与误差分析等方法论要求，2017 年纲要未作这一层约束。小学学段要求识别变量、制订简单的探究方案，初中学段要求应用控制变量方法、制订比较完整的探究方案。</a:t>
             </a:r>
             <a:endParaRPr lang="en-US" dirty="0"/>
           </a:p>
@@ -3886,7 +3886,7 @@
           <a:p>
             <a:r>
               <a:rPr lang="en-US" dirty="0"/>
-              <a:t>这一页是全场的支点，慢讲。做中学是这门课探究与物化那半边，做了加密与提标。它没有覆盖社会服务与职业体验，对责任担当的处理停在态度表述上，没有要求学生对他人或社区做任何事；价值体认走的是主题绑定的路径，与 2017 纲要从个体生活、社会生活及与大自然的接触中获得体验的路径不同。这个判断的意义在于：做中学是自家课程的一个子集被单独拎出来提了要求，不算外来入侵。台下的抵触情绪主要在这一页化解。</a:t>
+              <a:t>本页是全场的支点，需要放缓。做中学对应本课程探究与物化的一半，并作了加密与提标。它未覆盖社会服务与职业体验，对责任担当的处理停留在态度表述，未要求学生对他人或社区采取行动；价值体认走的是主题绑定路径，与 2017 年纲要经由个体生活、社会生活及与自然接触获得体验的路径不同。这一判断的意义在于：做中学是本课程的一个子集被单独提出并提高了要求，不构成外部介入。听众的抵触情绪主要在本页化解。</a:t>
             </a:r>
             <a:endParaRPr lang="en-US" dirty="0"/>
           </a:p>
@@ -3974,7 +3974,7 @@
           <a:p>
             <a:r>
               <a:rPr lang="en-US" dirty="0"/>
-              <a:t>全场脊柱，整场只出现这一次。说完停三秒。接着给两个具体补法，都从指南原文抠出来，不加自己的发挥：第一，把附件任务末尾的交流分享改成有对象、有回应、有留痕的行动，责任担当就落地了，任务结构没变；第二，指南社会协同条款写了鼓励有条件的学校邀请科学家、工程师等专业技术人员对学生的科学探究实践过程和结果进行指导评价，同一次到访，安排成点评就只是评价资源，安排成学生带问题清单提问对方的日常工作与判断依据，就是职业体验。差别在设计，不在成本。补这两个缺口不需要学科知识。</a:t>
+              <a:t>本场主张，全场仅出现一次，陈述后停顿。随后给出两项具体补法，均取自指南原文。其一，将附件任务末端的交流分享改为有对象、有回应、有留痕的行动，责任担当即可落到行动层，任务结构不变。其二，指南社会协同条款写明鼓励有条件的学校邀请科学家、工程师等专业技术人员对学生的科学探究实践过程和结果进行指导评价；同一次到访，安排为点评则仅获得评价资源，安排为学生持问题清单访谈其日常工作与判断依据则构成职业体验。差别在设计，不在成本。补这两处缺口不需要学科知识。</a:t>
             </a:r>
             <a:endParaRPr lang="en-US" dirty="0"/>
           </a:p>
@@ -4062,7 +4062,7 @@
           <a:p>
             <a:r>
               <a:rPr lang="en-US" dirty="0"/>
-              <a:t>现场投票，先甲后乙，数一下大致比例，不要急着揭晓。两份都是虚构的平行案例，不涉及任何真实学生，这一点在揭晓页说明。B 档页，60 分钟版整块删掉，直接从第 11 页的冲击强度图进入。</a:t>
+              <a:t>现场辨识，先甲后乙，记录大致比例，暂不揭晓。两份均为虚构的平行案例，不涉及任何真实学生，此点在揭晓页说明。本页属 B 档，60 分钟版整段删除，直接进入第 11 页。</a:t>
             </a:r>
             <a:endParaRPr lang="en-US" dirty="0"/>
           </a:p>
@@ -6136,7 +6136,7 @@
                 <a:ea typeface="Microsoft YaHei" pitchFamily="34" charset="-122"/>
                 <a:cs typeface="Microsoft YaHei" pitchFamily="34" charset="-120"/>
               </a:rPr>
-              <a:t>第二段　·　成果不可信之后，专业位置在哪里</a:t>
+              <a:t>第二段　·　成果可替代性与教师的专业位置</a:t>
             </a:r>
             <a:endParaRPr lang="en-US" sz="1000" dirty="0"/>
           </a:p>
@@ -6175,7 +6175,7 @@
                 <a:ea typeface="Microsoft YaHei" pitchFamily="34" charset="-122"/>
                 <a:cs typeface="Microsoft YaHei" pitchFamily="34" charset="-120"/>
               </a:rPr>
-              <a:t>揭晓</a:t>
+              <a:t>辨识结果</a:t>
             </a:r>
             <a:endParaRPr lang="en-US" sz="3200" dirty="0"/>
           </a:p>
@@ -6256,7 +6256,7 @@
                 <a:ea typeface="Microsoft YaHei" pitchFamily="34" charset="-122"/>
                 <a:cs typeface="Microsoft YaHei" pitchFamily="34" charset="-120"/>
               </a:rPr>
-              <a:t>两份都是虚构的。甲按小学生的实际水平写，乙按 AI 的默认输出写。</a:t>
+              <a:t>两份均为虚构。甲按小学生的实际水平撰写，乙按生成式 AI 的默认输出撰写。</a:t>
             </a:r>
             <a:endParaRPr lang="en-US" sz="1600" dirty="0"/>
           </a:p>
@@ -6337,7 +6337,7 @@
                 <a:ea typeface="Microsoft YaHei" pitchFamily="34" charset="-122"/>
                 <a:cs typeface="Microsoft YaHei" pitchFamily="34" charset="-120"/>
               </a:rPr>
-              <a:t>乙更完整、更规范、术语更多，也更像一份合格的研究方案。</a:t>
+              <a:t>乙在完整度、规范性与术语密度上均优于甲，更接近一份合格的研究方案。</a:t>
             </a:r>
             <a:endParaRPr lang="en-US" sz="1600" dirty="0"/>
           </a:p>
@@ -6418,7 +6418,7 @@
                 <a:ea typeface="Microsoft YaHei" pitchFamily="34" charset="-122"/>
                 <a:cs typeface="Microsoft YaHei" pitchFamily="34" charset="-120"/>
               </a:rPr>
-              <a:t>差别不在文本里：甲的作者数过那六个位置，乙的作者没有。</a:t>
+              <a:t>差别不在文本层面。甲的作者实地清点过那六个位置，乙的作者没有。</a:t>
             </a:r>
             <a:endParaRPr lang="en-US" sz="1600" dirty="0"/>
           </a:p>
@@ -6483,7 +6483,7 @@
                 <a:ea typeface="Microsoft YaHei" pitchFamily="34" charset="-122"/>
                 <a:cs typeface="Microsoft YaHei" pitchFamily="34" charset="-120"/>
               </a:rPr>
-              <a:t>成果看起来都合格。凭什么给分，是后面全部内容的起点。</a:t>
+              <a:t>两份方案在文本层面均可判为合格。评价依据何在，是后续内容的起点。</a:t>
             </a:r>
             <a:endParaRPr lang="en-US" sz="1000" dirty="0"/>
           </a:p>
@@ -6951,7 +6951,7 @@
                 <a:ea typeface="Microsoft YaHei" pitchFamily="34" charset="-122"/>
                 <a:cs typeface="Microsoft YaHei" pitchFamily="34" charset="-120"/>
               </a:rPr>
-              <a:t>第二段　·　成果不可信之后，专业位置在哪里</a:t>
+              <a:t>第二段　·　成果可替代性与教师的专业位置</a:t>
             </a:r>
             <a:endParaRPr lang="en-US" sz="1000" dirty="0"/>
           </a:p>
@@ -6990,7 +6990,7 @@
                 <a:ea typeface="Microsoft YaHei" pitchFamily="34" charset="-122"/>
                 <a:cs typeface="Microsoft YaHei" pitchFamily="34" charset="-120"/>
               </a:rPr>
-              <a:t>四种活动方式受影响的程度</a:t>
+              <a:t>四种活动方式受生成式 AI 影响的程度</a:t>
             </a:r>
             <a:endParaRPr lang="en-US" sz="3200" dirty="0"/>
           </a:p>
@@ -7547,7 +7547,7 @@
                 <a:ea typeface="Microsoft YaHei" pitchFamily="34" charset="-122"/>
                 <a:cs typeface="Microsoft YaHei" pitchFamily="34" charset="-120"/>
               </a:rPr>
-              <a:t>第二段　·　成果不可信之后，专业位置在哪里</a:t>
+              <a:t>第二段　·　成果可替代性与教师的专业位置</a:t>
             </a:r>
             <a:endParaRPr lang="en-US" sz="1000" dirty="0"/>
           </a:p>
@@ -7586,7 +7586,7 @@
                 <a:ea typeface="Microsoft YaHei" pitchFamily="34" charset="-122"/>
                 <a:cs typeface="Microsoft YaHei" pitchFamily="34" charset="-120"/>
               </a:rPr>
-              <a:t>两张图叠起来看</a:t>
+              <a:t>覆盖缺口与影响强度的交集</a:t>
             </a:r>
             <a:endParaRPr lang="en-US" sz="3200" dirty="0"/>
           </a:p>
@@ -7649,7 +7649,7 @@
                 <a:ea typeface="Microsoft YaHei" pitchFamily="34" charset="-122"/>
                 <a:cs typeface="Microsoft YaHei" pitchFamily="34" charset="-120"/>
               </a:rPr>
-              <a:t>做中学没覆盖的那半边，正好是 AI 冲击最轻的那半边。</a:t>
+              <a:t>做中学未覆盖的两种活动方式，正是受生成式 AI 影响最轻的两种。</a:t>
             </a:r>
             <a:endParaRPr lang="en-US" sz="1500" dirty="0"/>
           </a:p>
@@ -8117,7 +8117,7 @@
                 <a:ea typeface="Microsoft YaHei" pitchFamily="34" charset="-122"/>
                 <a:cs typeface="Microsoft YaHei" pitchFamily="34" charset="-120"/>
               </a:rPr>
-              <a:t>第二段　·　成果不可信之后，专业位置在哪里</a:t>
+              <a:t>第二段　·　成果可替代性与教师的专业位置</a:t>
             </a:r>
             <a:endParaRPr lang="en-US" sz="1000" dirty="0"/>
           </a:p>
@@ -8156,7 +8156,7 @@
                 <a:ea typeface="Microsoft YaHei" pitchFamily="34" charset="-122"/>
                 <a:cs typeface="Microsoft YaHei" pitchFamily="34" charset="-120"/>
               </a:rPr>
-              <a:t>但这不等于可以不管</a:t>
+              <a:t>被覆盖部分的教学压力</a:t>
             </a:r>
             <a:endParaRPr lang="en-US" sz="3200" dirty="0"/>
           </a:p>
@@ -8237,7 +8237,7 @@
                 <a:ea typeface="Microsoft YaHei" pitchFamily="34" charset="-122"/>
                 <a:cs typeface="Microsoft YaHei" pitchFamily="34" charset="-120"/>
               </a:rPr>
-              <a:t>被覆盖的那半边仍然要教，而且是国家现在加压的那一半。</a:t>
+              <a:t>被覆盖的一半仍须教学，且是当前政策加压的一半。</a:t>
             </a:r>
             <a:endParaRPr lang="en-US" sz="1600" dirty="0"/>
           </a:p>
@@ -8318,7 +8318,7 @@
                 <a:ea typeface="Microsoft YaHei" pitchFamily="34" charset="-122"/>
                 <a:cs typeface="Microsoft YaHei" pitchFamily="34" charset="-120"/>
               </a:rPr>
-              <a:t>任务时间紧，教师的本能是用 AI 去加速慢的环节。</a:t>
+              <a:t>任务周期紧张时，教师的本能是借助 AI 加速耗时的环节。</a:t>
             </a:r>
             <a:endParaRPr lang="en-US" sz="1600" dirty="0"/>
           </a:p>
@@ -8399,7 +8399,7 @@
                 <a:ea typeface="Microsoft YaHei" pitchFamily="34" charset="-122"/>
                 <a:cs typeface="Microsoft YaHei" pitchFamily="34" charset="-120"/>
               </a:rPr>
-              <a:t>慢的环节正是这门课的内容。</a:t>
+              <a:t>而耗时的环节正是本课程的教学内容。</a:t>
             </a:r>
             <a:endParaRPr lang="en-US" sz="1600" dirty="0"/>
           </a:p>
@@ -8867,7 +8867,7 @@
                 <a:ea typeface="Microsoft YaHei" pitchFamily="34" charset="-122"/>
                 <a:cs typeface="Microsoft YaHei" pitchFamily="34" charset="-120"/>
               </a:rPr>
-              <a:t>第三段　·　老问题清单，以及 AI 往哪边推</a:t>
+              <a:t>第三段　·　既有问题与生成式 AI 的作用方向</a:t>
             </a:r>
             <a:endParaRPr lang="en-US" sz="1000" dirty="0"/>
           </a:p>
@@ -8906,7 +8906,7 @@
                 <a:ea typeface="Microsoft YaHei" pitchFamily="34" charset="-122"/>
                 <a:cs typeface="Microsoft YaHei" pitchFamily="34" charset="-120"/>
               </a:rPr>
-              <a:t>六个老问题</a:t>
+              <a:t>课程实施的六类既有问题</a:t>
             </a:r>
             <a:endParaRPr lang="en-US" sz="3200" dirty="0"/>
           </a:p>
@@ -10004,7 +10004,7 @@
                 <a:ea typeface="Microsoft YaHei" pitchFamily="34" charset="-122"/>
                 <a:cs typeface="Microsoft YaHei" pitchFamily="34" charset="-120"/>
               </a:rPr>
-              <a:t>第三段　·　老问题清单，以及 AI 往哪边推</a:t>
+              <a:t>第三段　·　既有问题与生成式 AI 的作用方向</a:t>
             </a:r>
             <a:endParaRPr lang="en-US" sz="1000" dirty="0"/>
           </a:p>
@@ -10043,7 +10043,7 @@
                 <a:ea typeface="Microsoft YaHei" pitchFamily="34" charset="-122"/>
                 <a:cs typeface="Microsoft YaHei" pitchFamily="34" charset="-120"/>
               </a:rPr>
-              <a:t>这些不是印象</a:t>
+              <a:t>师资结构的实证依据</a:t>
             </a:r>
             <a:endParaRPr lang="en-US" sz="3200" dirty="0"/>
           </a:p>
@@ -10134,7 +10134,7 @@
                 <a:ea typeface="Microsoft YaHei" pitchFamily="34" charset="-122"/>
                 <a:cs typeface="Microsoft YaHei" pitchFamily="34" charset="-120"/>
               </a:rPr>
-              <a:t>师资兼任是普遍状况，且兼职教师的课程实施水平显著更低。</a:t>
+              <a:t>师资兼任为普遍状况，兼职教师的课程实施水平显著低于专职教师。</a:t>
             </a:r>
             <a:endParaRPr lang="en-US" sz="1600" dirty="0"/>
           </a:p>
@@ -10642,7 +10642,7 @@
                 <a:ea typeface="Microsoft YaHei" pitchFamily="34" charset="-122"/>
                 <a:cs typeface="Microsoft YaHei" pitchFamily="34" charset="-120"/>
               </a:rPr>
-              <a:t>这是全国范围的普遍现象，不是深圳的问题。</a:t>
+              <a:t>该状况属全国范围的普遍现象，非深圳一地的问题。</a:t>
             </a:r>
             <a:endParaRPr lang="en-US" sz="1000" dirty="0"/>
           </a:p>
@@ -11110,7 +11110,7 @@
                 <a:ea typeface="Microsoft YaHei" pitchFamily="34" charset="-122"/>
                 <a:cs typeface="Microsoft YaHei" pitchFamily="34" charset="-120"/>
               </a:rPr>
-              <a:t>第三段　·　老问题清单，以及 AI 往哪边推</a:t>
+              <a:t>第三段　·　既有问题与生成式 AI 的作用方向</a:t>
             </a:r>
             <a:endParaRPr lang="en-US" sz="1000" dirty="0"/>
           </a:p>
@@ -11149,7 +11149,7 @@
                 <a:ea typeface="Microsoft YaHei" pitchFamily="34" charset="-122"/>
                 <a:cs typeface="Microsoft YaHei" pitchFamily="34" charset="-120"/>
               </a:rPr>
-              <a:t>AI 往哪边推</a:t>
+              <a:t>生成式 AI 对既有问题的作用方向</a:t>
             </a:r>
             <a:endParaRPr lang="en-US" sz="3200" dirty="0"/>
           </a:p>
@@ -11851,7 +11851,7 @@
                 <a:ea typeface="Microsoft YaHei" pitchFamily="34" charset="-122"/>
                 <a:cs typeface="Microsoft YaHei" pitchFamily="34" charset="-120"/>
               </a:rPr>
-              <a:t>低阶排版与图表</a:t>
+              <a:t>排版与基础图表</a:t>
             </a:r>
             <a:endParaRPr lang="en-US" sz="1300" dirty="0"/>
           </a:p>
@@ -12202,7 +12202,7 @@
                 <a:ea typeface="Microsoft YaHei" pitchFamily="34" charset="-122"/>
                 <a:cs typeface="Microsoft YaHei" pitchFamily="34" charset="-120"/>
               </a:rPr>
-              <a:t>综评的公示签字机制</a:t>
+              <a:t>综合素质评价的公示与签字程序</a:t>
             </a:r>
             <a:endParaRPr lang="en-US" sz="1300" dirty="0"/>
           </a:p>
@@ -12670,7 +12670,7 @@
                 <a:ea typeface="Microsoft YaHei" pitchFamily="34" charset="-122"/>
                 <a:cs typeface="Microsoft YaHei" pitchFamily="34" charset="-120"/>
               </a:rPr>
-              <a:t>第三段　·　老问题清单，以及 AI 往哪边推</a:t>
+              <a:t>第三段　·　既有问题与生成式 AI 的作用方向</a:t>
             </a:r>
             <a:endParaRPr lang="en-US" sz="1000" dirty="0"/>
           </a:p>
@@ -12709,7 +12709,7 @@
                 <a:ea typeface="Microsoft YaHei" pitchFamily="34" charset="-122"/>
                 <a:cs typeface="Microsoft YaHei" pitchFamily="34" charset="-120"/>
               </a:rPr>
-              <a:t>三类做不实的项目</a:t>
+              <a:t>项目化学习的三类失效形态</a:t>
             </a:r>
             <a:endParaRPr lang="en-US" sz="3200" dirty="0"/>
           </a:p>
@@ -12842,7 +12842,7 @@
                 <a:ea typeface="Microsoft YaHei" pitchFamily="34" charset="-122"/>
                 <a:cs typeface="Microsoft YaHei" pitchFamily="34" charset="-120"/>
               </a:rPr>
-              <a:t>好看，但没有真实的问题</a:t>
+              <a:t>成果形态完整，但缺少真实问题</a:t>
             </a:r>
             <a:endParaRPr lang="en-US" sz="1150" dirty="0"/>
           </a:p>
@@ -12975,7 +12975,7 @@
                 <a:ea typeface="Microsoft YaHei" pitchFamily="34" charset="-122"/>
                 <a:cs typeface="Microsoft YaHei" pitchFamily="34" charset="-120"/>
               </a:rPr>
-              <a:t>几个学科拼在一起，各做各的</a:t>
+              <a:t>多学科并置，各自独立，未形成整合</a:t>
             </a:r>
             <a:endParaRPr lang="en-US" sz="1150" dirty="0"/>
           </a:p>
@@ -13108,7 +13108,7 @@
                 <a:ea typeface="Microsoft YaHei" pitchFamily="34" charset="-122"/>
                 <a:cs typeface="Microsoft YaHei" pitchFamily="34" charset="-120"/>
               </a:rPr>
-              <a:t>有活动，无思维</a:t>
+              <a:t>有活动过程，无思维发生</a:t>
             </a:r>
             <a:endParaRPr lang="en-US" sz="1150" dirty="0"/>
           </a:p>
@@ -13212,7 +13212,7 @@
                 <a:ea typeface="Microsoft YaHei" pitchFamily="34" charset="-122"/>
                 <a:cs typeface="Microsoft YaHei" pitchFamily="34" charset="-120"/>
               </a:rPr>
-              <a:t>AI 让空心项目做得更漂亮：有活动，无思维，但成果集很好看。</a:t>
+              <a:t>生成式 AI 提高的是成果的完成度。空心项目因此更难从成果上识别。</a:t>
             </a:r>
             <a:endParaRPr lang="en-US" sz="1000" dirty="0"/>
           </a:p>
@@ -13680,7 +13680,7 @@
                 <a:ea typeface="Microsoft YaHei" pitchFamily="34" charset="-122"/>
                 <a:cs typeface="Microsoft YaHei" pitchFamily="34" charset="-120"/>
               </a:rPr>
-              <a:t>第三段　·　老问题清单，以及 AI 往哪边推</a:t>
+              <a:t>第三段　·　既有问题与生成式 AI 的作用方向</a:t>
             </a:r>
             <a:endParaRPr lang="en-US" sz="1000" dirty="0"/>
           </a:p>
@@ -13719,7 +13719,7 @@
                 <a:ea typeface="Microsoft YaHei" pitchFamily="34" charset="-122"/>
                 <a:cs typeface="Microsoft YaHei" pitchFamily="34" charset="-120"/>
               </a:rPr>
-              <a:t>表现提升不等于学习发生</a:t>
+              <a:t>表现提升与学习发生的分离</a:t>
             </a:r>
             <a:endParaRPr lang="en-US" sz="3200" dirty="0"/>
           </a:p>
@@ -14396,7 +14396,7 @@
                 <a:ea typeface="Microsoft YaHei" pitchFamily="34" charset="-122"/>
                 <a:cs typeface="Microsoft YaHei" pitchFamily="34" charset="-120"/>
               </a:rPr>
-              <a:t>样本是大学生。这条证据说明的是机制，不是数值。</a:t>
+              <a:t>该研究的样本为大学生。此处引用的是其揭示的机制，而非效应量数值。</a:t>
             </a:r>
             <a:endParaRPr lang="en-US" sz="1000" dirty="0"/>
           </a:p>
@@ -14840,7 +14840,7 @@
         <p:spPr>
           <a:xfrm>
             <a:off x="1295400" y="2468880"/>
-            <a:ext cx="9158935" cy="1737360"/>
+            <a:ext cx="9158935" cy="2286000"/>
           </a:xfrm>
           <a:prstGeom prst="rect">
             <a:avLst/>
@@ -14859,7 +14859,7 @@
               <a:buNone/>
             </a:pPr>
             <a:r>
-              <a:rPr lang="en-US" sz="2800" b="1" dirty="0">
+              <a:rPr lang="en-US" sz="2500" b="1" dirty="0">
                 <a:solidFill>
                   <a:srgbClr val="0F1B2D"/>
                 </a:solidFill>
@@ -14867,9 +14867,9 @@
                 <a:ea typeface="Microsoft YaHei" pitchFamily="34" charset="-122"/>
                 <a:cs typeface="Microsoft YaHei" pitchFamily="34" charset="-120"/>
               </a:rPr>
-              <a:t>AI 加速掉的，正是这门课要教的那部分。</a:t>
-            </a:r>
-            <a:endParaRPr lang="en-US" sz="2800" dirty="0"/>
+              <a:t>生成式 AI 所加速的环节，正是本课程的教学内容本身。</a:t>
+            </a:r>
+            <a:endParaRPr lang="en-US" sz="2500" dirty="0"/>
           </a:p>
         </p:txBody>
       </p:sp>
@@ -15315,7 +15315,7 @@
                 <a:ea typeface="Microsoft YaHei" pitchFamily="34" charset="-122"/>
                 <a:cs typeface="Microsoft YaHei" pitchFamily="34" charset="-120"/>
               </a:rPr>
-              <a:t>开场　·　做中学九月落地</a:t>
+              <a:t>开场　·　领航行动指南与本课程的关系</a:t>
             </a:r>
             <a:endParaRPr lang="en-US" sz="1000" dirty="0"/>
           </a:p>
@@ -15354,7 +15354,7 @@
                 <a:ea typeface="Microsoft YaHei" pitchFamily="34" charset="-122"/>
                 <a:cs typeface="Microsoft YaHei" pitchFamily="34" charset="-120"/>
               </a:rPr>
-              <a:t>一份七月底印发的文件</a:t>
+              <a:t>领航行动指南的文件信息</a:t>
             </a:r>
             <a:endParaRPr lang="en-US" sz="3200" dirty="0"/>
           </a:p>
@@ -16296,7 +16296,7 @@
                 <a:ea typeface="Microsoft YaHei" pitchFamily="34" charset="-122"/>
                 <a:cs typeface="Microsoft YaHei" pitchFamily="34" charset="-120"/>
               </a:rPr>
-              <a:t>第四段　·　判断三问与环节表</a:t>
+              <a:t>第四段　·　环节配置的判断方法</a:t>
             </a:r>
             <a:endParaRPr lang="en-US" sz="1000" dirty="0"/>
           </a:p>
@@ -16335,7 +16335,7 @@
                 <a:ea typeface="Microsoft YaHei" pitchFamily="34" charset="-122"/>
                 <a:cs typeface="Microsoft YaHei" pitchFamily="34" charset="-120"/>
               </a:rPr>
-              <a:t>判断的三个问题</a:t>
+              <a:t>环节配置的三项判断</a:t>
             </a:r>
             <a:endParaRPr lang="en-US" sz="3200" dirty="0"/>
           </a:p>
@@ -16413,7 +16413,7 @@
                 <a:ea typeface="Microsoft YaHei" pitchFamily="34" charset="-122"/>
                 <a:cs typeface="Microsoft YaHei" pitchFamily="34" charset="-120"/>
               </a:rPr>
-              <a:t>这一步要练的能力是什么</a:t>
+              <a:t>该环节要训练的能力是什么</a:t>
             </a:r>
             <a:endParaRPr lang="en-US" sz="2300" dirty="0"/>
           </a:p>
@@ -16491,7 +16491,7 @@
                 <a:ea typeface="Microsoft YaHei" pitchFamily="34" charset="-122"/>
                 <a:cs typeface="Microsoft YaHei" pitchFamily="34" charset="-120"/>
               </a:rPr>
-              <a:t>AI 替掉的是不是正好就是这个能力</a:t>
+              <a:t>AI 替代的是否正是该能力</a:t>
             </a:r>
             <a:endParaRPr lang="en-US" sz="2300" dirty="0"/>
           </a:p>
@@ -16569,7 +16569,7 @@
                 <a:ea typeface="Microsoft YaHei" pitchFamily="34" charset="-122"/>
                 <a:cs typeface="Microsoft YaHei" pitchFamily="34" charset="-120"/>
               </a:rPr>
-              <a:t>如果替掉了，我用什么把它补回来</a:t>
+              <a:t>若已被替代，用什么加以补偿</a:t>
             </a:r>
             <a:endParaRPr lang="en-US" sz="2300" dirty="0"/>
           </a:p>
@@ -16634,7 +16634,7 @@
                 <a:ea typeface="Microsoft YaHei" pitchFamily="34" charset="-122"/>
                 <a:cs typeface="Microsoft YaHei" pitchFamily="34" charset="-120"/>
               </a:rPr>
-              <a:t>这三问对任何一个环节都适用，不需要记住任何工具的名字。</a:t>
+              <a:t>三项判断适用于任何一个环节，不依赖对具体工具的了解。</a:t>
             </a:r>
             <a:endParaRPr lang="en-US" sz="1000" dirty="0"/>
           </a:p>
@@ -17117,7 +17117,7 @@
         <p:spPr>
           <a:xfrm>
             <a:off x="1295400" y="2615184"/>
-            <a:ext cx="9158935" cy="1737360"/>
+            <a:ext cx="9158935" cy="2286000"/>
           </a:xfrm>
           <a:prstGeom prst="rect">
             <a:avLst/>
@@ -17136,7 +17136,7 @@
               <a:buNone/>
             </a:pPr>
             <a:r>
-              <a:rPr lang="en-US" sz="2800" b="1" dirty="0">
+              <a:rPr lang="en-US" sz="2500" b="1" dirty="0">
                 <a:solidFill>
                   <a:srgbClr val="0F1B2D"/>
                 </a:solidFill>
@@ -17144,9 +17144,9 @@
                 <a:ea typeface="Microsoft YaHei" pitchFamily="34" charset="-122"/>
                 <a:cs typeface="Microsoft YaHei" pitchFamily="34" charset="-120"/>
               </a:rPr>
-              <a:t>只有一条：这一步的困难，是不是这门课要学生经历的困难。</a:t>
-            </a:r>
-            <a:endParaRPr lang="en-US" sz="2800" dirty="0"/>
+              <a:t>判据只有一条：该环节的困难，是否属于课程要求学生经历的困难。</a:t>
+            </a:r>
+            <a:endParaRPr lang="en-US" sz="2500" dirty="0"/>
           </a:p>
         </p:txBody>
       </p:sp>
@@ -17612,7 +17612,7 @@
                 <a:ea typeface="Microsoft YaHei" pitchFamily="34" charset="-122"/>
                 <a:cs typeface="Microsoft YaHei" pitchFamily="34" charset="-120"/>
               </a:rPr>
-              <a:t>第四段　·　判断三问与环节表</a:t>
+              <a:t>第四段　·　环节配置的判断方法</a:t>
             </a:r>
             <a:endParaRPr lang="en-US" sz="1000" dirty="0"/>
           </a:p>
@@ -17651,7 +17651,7 @@
                 <a:ea typeface="Microsoft YaHei" pitchFamily="34" charset="-122"/>
                 <a:cs typeface="Microsoft YaHei" pitchFamily="34" charset="-120"/>
               </a:rPr>
-              <a:t>六个环节的空白表</a:t>
+              <a:t>六环节配置表（空白）</a:t>
             </a:r>
             <a:endParaRPr lang="en-US" sz="3200" dirty="0"/>
           </a:p>
@@ -19457,7 +19457,7 @@
                 <a:ea typeface="Microsoft YaHei" pitchFamily="34" charset="-122"/>
                 <a:cs typeface="Microsoft YaHei" pitchFamily="34" charset="-120"/>
               </a:rPr>
-              <a:t>这一页可以直接打印，一个任务填一张。</a:t>
+              <a:t>本表可直接打印使用，每项任务填写一张。</a:t>
             </a:r>
             <a:endParaRPr lang="en-US" sz="1000" dirty="0"/>
           </a:p>
@@ -19925,7 +19925,7 @@
                 <a:ea typeface="Microsoft YaHei" pitchFamily="34" charset="-122"/>
                 <a:cs typeface="Microsoft YaHei" pitchFamily="34" charset="-120"/>
               </a:rPr>
-              <a:t>第四段　·　判断三问与环节表</a:t>
+              <a:t>第四段　·　环节配置的判断方法</a:t>
             </a:r>
             <a:endParaRPr lang="en-US" sz="1000" dirty="0"/>
           </a:p>
@@ -19964,7 +19964,7 @@
                 <a:ea typeface="Microsoft YaHei" pitchFamily="34" charset="-122"/>
                 <a:cs typeface="Microsoft YaHei" pitchFamily="34" charset="-120"/>
               </a:rPr>
-              <a:t>形状</a:t>
+              <a:t>六个环节的收放配置</a:t>
             </a:r>
             <a:endParaRPr lang="en-US" sz="3200" dirty="0"/>
           </a:p>
@@ -20027,7 +20027,7 @@
                 <a:ea typeface="Microsoft YaHei" pitchFamily="34" charset="-122"/>
                 <a:cs typeface="Microsoft YaHei" pitchFamily="34" charset="-120"/>
               </a:rPr>
-              <a:t>内核收，外圈放。六个环节本身前紧后松，任务前的检索与任务后的表达可以放开。</a:t>
+              <a:t>内核收紧，外圈放开。六个环节自身呈前紧后松，任务前的背景检索与任务后的表达传播可以放开。</a:t>
             </a:r>
             <a:endParaRPr lang="en-US" sz="1600" dirty="0"/>
           </a:p>
@@ -20069,7 +20069,7 @@
                 <a:ea typeface="Microsoft YaHei" pitchFamily="34" charset="-122"/>
                 <a:cs typeface="Microsoft YaHei" pitchFamily="34" charset="-120"/>
               </a:rPr>
-              <a:t>这与多数教师的直觉相反：第一反应是让 AI 帮着想点子，而想点子恰好是最该收的那一环。</a:t>
+              <a:t>该配置与常见直觉相反。教师的第一反应多为借助 AI 生成选题方向，而选题恰是最应收紧的环节。</a:t>
             </a:r>
             <a:endParaRPr lang="en-US" sz="1150" dirty="0"/>
           </a:p>
@@ -20537,7 +20537,7 @@
                 <a:ea typeface="Microsoft YaHei" pitchFamily="34" charset="-122"/>
                 <a:cs typeface="Microsoft YaHei" pitchFamily="34" charset="-120"/>
               </a:rPr>
-              <a:t>第五段　·　案例走查：生命健康双学段</a:t>
+              <a:t>第五段　·　生命健康主题的双学段案例</a:t>
             </a:r>
             <a:endParaRPr lang="en-US" sz="1000" dirty="0"/>
           </a:p>
@@ -20576,7 +20576,7 @@
                 <a:ea typeface="Microsoft YaHei" pitchFamily="34" charset="-122"/>
                 <a:cs typeface="Microsoft YaHei" pitchFamily="34" charset="-120"/>
               </a:rPr>
-              <a:t>两个任务</a:t>
+              <a:t>生命健康主题的两项任务</a:t>
             </a:r>
             <a:endParaRPr lang="en-US" sz="3200" dirty="0"/>
           </a:p>
@@ -21681,7 +21681,7 @@
                 <a:ea typeface="Microsoft YaHei" pitchFamily="34" charset="-122"/>
                 <a:cs typeface="Microsoft YaHei" pitchFamily="34" charset="-120"/>
               </a:rPr>
-              <a:t>第五段　·　案例走查：生命健康双学段</a:t>
+              <a:t>第五段　·　生命健康主题的双学段案例</a:t>
             </a:r>
             <a:endParaRPr lang="en-US" sz="1000" dirty="0"/>
           </a:p>
@@ -21919,7 +21919,7 @@
                 <a:ea typeface="Microsoft YaHei" pitchFamily="34" charset="-122"/>
                 <a:cs typeface="Microsoft YaHei" pitchFamily="34" charset="-120"/>
               </a:rPr>
-              <a:t>从班级视力数据出发。学生先观察身边同学的用眼情况，自己提出想弄清楚的问题。</a:t>
+              <a:t>以班级视力数据为起点。学生观察同学的用眼情况，自行提出待探究的问题。</a:t>
             </a:r>
             <a:endParaRPr lang="en-US" sz="1300" dirty="0"/>
           </a:p>
@@ -22052,7 +22052,7 @@
                 <a:ea typeface="Microsoft YaHei" pitchFamily="34" charset="-122"/>
                 <a:cs typeface="Microsoft YaHei" pitchFamily="34" charset="-120"/>
               </a:rPr>
-              <a:t>从体质健康监测数据出发。学生调查同学对食物营养成分的认识偏差，自己提出问题。</a:t>
+              <a:t>以体质健康监测数据为起点。学生调查同学对食物营养成分的认识偏差，自行提出问题。</a:t>
             </a:r>
             <a:endParaRPr lang="en-US" sz="1300" dirty="0"/>
           </a:p>
@@ -22094,7 +22094,7 @@
                 <a:ea typeface="Microsoft YaHei" pitchFamily="34" charset="-122"/>
                 <a:cs typeface="Microsoft YaHei" pitchFamily="34" charset="-120"/>
               </a:rPr>
-              <a:t>学生先自己提。提完之后可以用 AI 检索这个问题别人怎么问过，检索结果作为对照，不作为替代。</a:t>
+              <a:t>学生先自行提出问题。提出之后可用 AI 检索同类问题的既有表述，检索结果作为对照，不作为替代。</a:t>
             </a:r>
             <a:endParaRPr lang="en-US" sz="1800" dirty="0"/>
           </a:p>
@@ -22156,7 +22156,7 @@
                 <a:ea typeface="Microsoft YaHei" pitchFamily="34" charset="-122"/>
                 <a:cs typeface="Microsoft YaHei" pitchFamily="34" charset="-120"/>
               </a:rPr>
-              <a:t>这一页的额外落点</a:t>
+              <a:t>配套动作</a:t>
             </a:r>
             <a:endParaRPr lang="en-US" sz="950" dirty="0"/>
           </a:p>
@@ -22198,7 +22198,7 @@
                 <a:ea typeface="Microsoft YaHei" pitchFamily="34" charset="-122"/>
                 <a:cs typeface="Microsoft YaHei" pitchFamily="34" charset="-120"/>
               </a:rPr>
-              <a:t>问题墙的位置。让学生一周内贴出三个真实困扰，教师从中挑一个打磨成驱动性问题。这一步不用 AI。</a:t>
+              <a:t>设置问题墙。学生一周内提交三个真实困扰，教师从中选取一个打磨为驱动性问题。本环节不使用 AI。</a:t>
             </a:r>
             <a:endParaRPr lang="en-US" sz="1150" dirty="0"/>
           </a:p>
@@ -22666,7 +22666,7 @@
                 <a:ea typeface="Microsoft YaHei" pitchFamily="34" charset="-122"/>
                 <a:cs typeface="Microsoft YaHei" pitchFamily="34" charset="-120"/>
               </a:rPr>
-              <a:t>第五段　·　案例走查：生命健康双学段</a:t>
+              <a:t>第五段　·　生命健康主题的双学段案例</a:t>
             </a:r>
             <a:endParaRPr lang="en-US" sz="1000" dirty="0"/>
           </a:p>
@@ -22904,7 +22904,7 @@
                 <a:ea typeface="Microsoft YaHei" pitchFamily="34" charset="-122"/>
                 <a:cs typeface="Microsoft YaHei" pitchFamily="34" charset="-120"/>
               </a:rPr>
-              <a:t>用卡纸和透镜模拟近视成因。学生要说清楚改变的是哪个量，不变的是哪些量。</a:t>
+              <a:t>以卡纸与透镜模拟近视成因。学生须说明所改变的变量与所控制的变量。</a:t>
             </a:r>
             <a:endParaRPr lang="en-US" sz="1300" dirty="0"/>
           </a:p>
@@ -23037,7 +23037,7 @@
                 <a:ea typeface="Microsoft YaHei" pitchFamily="34" charset="-122"/>
                 <a:cs typeface="Microsoft YaHei" pitchFamily="34" charset="-120"/>
               </a:rPr>
-              <a:t>设计对照实验，探究不同加工、储存方式对营养成分含量的影响。</a:t>
+              <a:t>设计对照实验，探究不同加工与储存方式对营养成分含量的影响。</a:t>
             </a:r>
             <a:endParaRPr lang="en-US" sz="1300" dirty="0"/>
           </a:p>
@@ -23079,7 +23079,7 @@
                 <a:ea typeface="Microsoft YaHei" pitchFamily="34" charset="-122"/>
                 <a:cs typeface="Microsoft YaHei" pitchFamily="34" charset="-120"/>
               </a:rPr>
-              <a:t>AI 可以给三个方向让学生挑，可以给学生的方案挑毛病。不出成稿方案。</a:t>
+              <a:t>AI 可提供若干备选方向供学生选择，可对学生已有方案提出质疑。不得输出成稿方案。</a:t>
             </a:r>
             <a:endParaRPr lang="en-US" sz="1800" dirty="0"/>
           </a:p>
@@ -23141,7 +23141,7 @@
                 <a:ea typeface="Microsoft YaHei" pitchFamily="34" charset="-122"/>
                 <a:cs typeface="Microsoft YaHei" pitchFamily="34" charset="-120"/>
               </a:rPr>
-              <a:t>为什么是半收</a:t>
+              <a:t>半收的依据</a:t>
             </a:r>
             <a:endParaRPr lang="en-US" sz="950" dirty="0"/>
           </a:p>
@@ -23183,7 +23183,7 @@
                 <a:ea typeface="Microsoft YaHei" pitchFamily="34" charset="-122"/>
                 <a:cs typeface="Microsoft YaHei" pitchFamily="34" charset="-120"/>
               </a:rPr>
-              <a:t>这一步的评价证据是探究实践能力里的变量识别与控制。挑毛病不会替掉这个能力，出成稿会。</a:t>
+              <a:t>本环节的评价证据是探究实践能力中的变量识别与控制。提出质疑不替代该能力，输出成稿方案则替代该能力。</a:t>
             </a:r>
             <a:endParaRPr lang="en-US" sz="1150" dirty="0"/>
           </a:p>
@@ -23651,7 +23651,7 @@
                 <a:ea typeface="Microsoft YaHei" pitchFamily="34" charset="-122"/>
                 <a:cs typeface="Microsoft YaHei" pitchFamily="34" charset="-120"/>
               </a:rPr>
-              <a:t>第五段　·　案例走查：生命健康双学段</a:t>
+              <a:t>第五段　·　生命健康主题的双学段案例</a:t>
             </a:r>
             <a:endParaRPr lang="en-US" sz="1000" dirty="0"/>
           </a:p>
@@ -23889,7 +23889,7 @@
                 <a:ea typeface="Microsoft YaHei" pitchFamily="34" charset="-122"/>
                 <a:cs typeface="Microsoft YaHei" pitchFamily="34" charset="-120"/>
               </a:rPr>
-              <a:t>照度、距离、时长，学生自己测自己记。</a:t>
+              <a:t>照度、距离与时长由学生自行测量并记录。</a:t>
             </a:r>
             <a:endParaRPr lang="en-US" sz="1300" dirty="0"/>
           </a:p>
@@ -24022,7 +24022,7 @@
                 <a:ea typeface="Microsoft YaHei" pitchFamily="34" charset="-122"/>
                 <a:cs typeface="Microsoft YaHei" pitchFamily="34" charset="-120"/>
               </a:rPr>
-              <a:t>对照实验的原始数据，学生自己做自己记。</a:t>
+              <a:t>对照实验的原始数据由学生自行获得并记录。</a:t>
             </a:r>
             <a:endParaRPr lang="en-US" sz="1300" dirty="0"/>
           </a:p>
@@ -24064,7 +24064,7 @@
                 <a:ea typeface="Microsoft YaHei" pitchFamily="34" charset="-122"/>
                 <a:cs typeface="Microsoft YaHei" pitchFamily="34" charset="-120"/>
               </a:rPr>
-              <a:t>原始数据必须自己测、自己问。整理、作图、异常值标注可以用 AI。</a:t>
+              <a:t>原始数据须由学生自行测量或调查获得。数据整理、作图与异常值标注可借助 AI。</a:t>
             </a:r>
             <a:endParaRPr lang="en-US" sz="1800" dirty="0"/>
           </a:p>
@@ -24172,7 +24172,7 @@
                 <a:ea typeface="Microsoft YaHei" pitchFamily="34" charset="-122"/>
                 <a:cs typeface="Microsoft YaHei" pitchFamily="34" charset="-120"/>
               </a:rPr>
-              <a:t>体质健康数据属于敏感信息。用代号，不用姓名学号；健康与学业原始数据不上传公共工具；只用学校白名单内的工具。</a:t>
+              <a:t>体质健康数据属敏感信息。使用代号，不使用姓名与学号；健康与学业原始数据不上传公共工具；仅使用学校白名单内的工具。</a:t>
             </a:r>
             <a:endParaRPr lang="en-US" sz="1150" dirty="0"/>
           </a:p>
@@ -24640,7 +24640,7 @@
                 <a:ea typeface="Microsoft YaHei" pitchFamily="34" charset="-122"/>
                 <a:cs typeface="Microsoft YaHei" pitchFamily="34" charset="-120"/>
               </a:rPr>
-              <a:t>第五段　·　案例走查：生命健康双学段</a:t>
+              <a:t>第五段　·　生命健康主题的双学段案例</a:t>
             </a:r>
             <a:endParaRPr lang="en-US" sz="1000" dirty="0"/>
           </a:p>
@@ -24878,7 +24878,7 @@
                 <a:ea typeface="Microsoft YaHei" pitchFamily="34" charset="-122"/>
                 <a:cs typeface="Microsoft YaHei" pitchFamily="34" charset="-120"/>
               </a:rPr>
-              <a:t>模拟结果和预想不一样的时候，学生自己找原因。</a:t>
+              <a:t>模拟结果与预期不符时，由学生自行分析原因。</a:t>
             </a:r>
             <a:endParaRPr lang="en-US" sz="1300" dirty="0"/>
           </a:p>
@@ -25011,7 +25011,7 @@
                 <a:ea typeface="Microsoft YaHei" pitchFamily="34" charset="-122"/>
                 <a:cs typeface="Microsoft YaHei" pitchFamily="34" charset="-120"/>
               </a:rPr>
-              <a:t>对照实验数据出现异常的时候，学生自己解释。</a:t>
+              <a:t>对照实验数据出现异常时，由学生自行解释。</a:t>
             </a:r>
             <a:endParaRPr lang="en-US" sz="1300" dirty="0"/>
           </a:p>
@@ -25053,7 +25053,7 @@
                 <a:ea typeface="Microsoft YaHei" pitchFamily="34" charset="-122"/>
                 <a:cs typeface="Microsoft YaHei" pitchFamily="34" charset="-120"/>
               </a:rPr>
-              <a:t>这一步不开 AI。AI 一解释，失败就不再是学习材料。</a:t>
+              <a:t>本环节不使用 AI。一旦由 AI 给出解释，失败便不再具备学习材料的价值。</a:t>
             </a:r>
             <a:endParaRPr lang="en-US" sz="1800" dirty="0"/>
           </a:p>
@@ -25625,7 +25625,7 @@
                 <a:ea typeface="Microsoft YaHei" pitchFamily="34" charset="-122"/>
                 <a:cs typeface="Microsoft YaHei" pitchFamily="34" charset="-120"/>
               </a:rPr>
-              <a:t>第五段　·　案例走查：生命健康双学段</a:t>
+              <a:t>第五段　·　生命健康主题的双学段案例</a:t>
             </a:r>
             <a:endParaRPr lang="en-US" sz="1000" dirty="0"/>
           </a:p>
@@ -25863,7 +25863,7 @@
                 <a:ea typeface="Microsoft YaHei" pitchFamily="34" charset="-122"/>
                 <a:cs typeface="Microsoft YaHei" pitchFamily="34" charset="-120"/>
               </a:rPr>
-              <a:t>用废旧材料做坐姿矫正支架或护眼提醒卡，测试之后再改一版。</a:t>
+              <a:t>以废旧材料制作坐姿矫正支架或护眼提醒卡，测试后修改一版。</a:t>
             </a:r>
             <a:endParaRPr lang="en-US" sz="1300" dirty="0"/>
           </a:p>
@@ -26038,7 +26038,7 @@
                 <a:ea typeface="Microsoft YaHei" pitchFamily="34" charset="-122"/>
                 <a:cs typeface="Microsoft YaHei" pitchFamily="34" charset="-120"/>
               </a:rPr>
-              <a:t>查材料属性、找同类结构可以。出设计图不行。</a:t>
+              <a:t>查询材料属性、检索同类结构可行。输出成品设计方案不可行。</a:t>
             </a:r>
             <a:endParaRPr lang="en-US" sz="1800" dirty="0"/>
           </a:p>
@@ -26100,7 +26100,7 @@
                 <a:ea typeface="Microsoft YaHei" pitchFamily="34" charset="-122"/>
                 <a:cs typeface="Microsoft YaHei" pitchFamily="34" charset="-120"/>
               </a:rPr>
-              <a:t>迭代是硬要求</a:t>
+              <a:t>迭代要求</a:t>
             </a:r>
             <a:endParaRPr lang="en-US" sz="950" dirty="0"/>
           </a:p>
@@ -26142,7 +26142,7 @@
                 <a:ea typeface="Microsoft YaHei" pitchFamily="34" charset="-122"/>
                 <a:cs typeface="Microsoft YaHei" pitchFamily="34" charset="-120"/>
               </a:rPr>
-              <a:t>做中学的物化带迭代要求：测试、优化、再测试。只做一版不算走完这一步。</a:t>
+              <a:t>做中学的物化环节带迭代要求：测试、优化、再测试。单一版本不构成完成。</a:t>
             </a:r>
             <a:endParaRPr lang="en-US" sz="1150" dirty="0"/>
           </a:p>
@@ -26590,7 +26590,7 @@
                 <a:ea typeface="Microsoft YaHei" pitchFamily="34" charset="-122"/>
                 <a:cs typeface="Microsoft YaHei" pitchFamily="34" charset="-120"/>
               </a:rPr>
-              <a:t>开场　·　做中学九月落地</a:t>
+              <a:t>开场　·　领航行动指南与本课程的关系</a:t>
             </a:r>
             <a:endParaRPr lang="en-US" sz="1000" dirty="0"/>
           </a:p>
@@ -26629,7 +26629,7 @@
                 <a:ea typeface="Microsoft YaHei" pitchFamily="34" charset="-122"/>
                 <a:cs typeface="Microsoft YaHei" pitchFamily="34" charset="-120"/>
               </a:rPr>
-              <a:t>要求的是学生走完过程</a:t>
+              <a:t>指南对学习过程的要求</a:t>
             </a:r>
             <a:endParaRPr lang="en-US" sz="3200" dirty="0"/>
           </a:p>
@@ -28093,7 +28093,7 @@
                 <a:ea typeface="Microsoft YaHei" pitchFamily="34" charset="-122"/>
                 <a:cs typeface="Microsoft YaHei" pitchFamily="34" charset="-120"/>
               </a:rPr>
-              <a:t>第五段　·　案例走查：生命健康双学段</a:t>
+              <a:t>第五段　·　生命健康主题的双学段案例</a:t>
             </a:r>
             <a:endParaRPr lang="en-US" sz="1000" dirty="0"/>
           </a:p>
@@ -28331,7 +28331,7 @@
                 <a:ea typeface="Microsoft YaHei" pitchFamily="34" charset="-122"/>
                 <a:cs typeface="Microsoft YaHei" pitchFamily="34" charset="-120"/>
               </a:rPr>
-              <a:t>面向一二年级做护眼倡议与工具试用，收集使用反馈，再改一版。</a:t>
+              <a:t>面向一二年级开展护眼倡议与工具试用，收集反馈后修改一版。</a:t>
             </a:r>
             <a:endParaRPr lang="en-US" sz="1300" dirty="0"/>
           </a:p>
@@ -28464,7 +28464,7 @@
                 <a:ea typeface="Microsoft YaHei" pitchFamily="34" charset="-122"/>
                 <a:cs typeface="Microsoft YaHei" pitchFamily="34" charset="-120"/>
               </a:rPr>
-              <a:t>面向社区居民做健康饮食科普宣传，提出健康饮食倡议。</a:t>
+              <a:t>面向社区居民开展健康饮食科普宣传，提出健康饮食倡议。</a:t>
             </a:r>
             <a:endParaRPr lang="en-US" sz="1300" dirty="0"/>
           </a:p>
@@ -28506,7 +28506,7 @@
                 <a:ea typeface="Microsoft YaHei" pitchFamily="34" charset="-122"/>
                 <a:cs typeface="Microsoft YaHei" pitchFamily="34" charset="-120"/>
               </a:rPr>
-              <a:t>思维已经发生，AI 用于表达是低风险的。用了要标注。</a:t>
+              <a:t>此时思维过程已经完成，AI 用于表达的风险较低。使用后须标注。</a:t>
             </a:r>
             <a:endParaRPr lang="en-US" sz="1800" dirty="0"/>
           </a:p>
@@ -28568,7 +28568,7 @@
                 <a:ea typeface="Microsoft YaHei" pitchFamily="34" charset="-122"/>
                 <a:cs typeface="Microsoft YaHei" pitchFamily="34" charset="-120"/>
               </a:rPr>
-              <a:t>这一步是转成社会服务的接口</a:t>
+              <a:t>转为社会服务的接口</a:t>
             </a:r>
             <a:endParaRPr lang="en-US" sz="950" dirty="0"/>
           </a:p>
@@ -28610,7 +28610,7 @@
                 <a:ea typeface="Microsoft YaHei" pitchFamily="34" charset="-122"/>
                 <a:cs typeface="Microsoft YaHei" pitchFamily="34" charset="-120"/>
               </a:rPr>
-              <a:t>把展示改成有对象、有回应、有留痕的行动，责任担当就从态度落到了行动。事先跟对方约好给一次答复。</a:t>
+              <a:t>将展示改为有对象、有回应、有留痕的行动，责任担当即由态度落到行动。须事先约定对方给出一次答复。</a:t>
             </a:r>
             <a:endParaRPr lang="en-US" sz="1150" dirty="0"/>
           </a:p>
@@ -29078,7 +29078,7 @@
                 <a:ea typeface="Microsoft YaHei" pitchFamily="34" charset="-122"/>
                 <a:cs typeface="Microsoft YaHei" pitchFamily="34" charset="-120"/>
               </a:rPr>
-              <a:t>第五段　·　案例走查：生命健康双学段</a:t>
+              <a:t>第五段　·　生命健康主题的双学段案例</a:t>
             </a:r>
             <a:endParaRPr lang="en-US" sz="1000" dirty="0"/>
           </a:p>
@@ -29117,7 +29117,7 @@
                 <a:ea typeface="Microsoft YaHei" pitchFamily="34" charset="-122"/>
                 <a:cs typeface="Microsoft YaHei" pitchFamily="34" charset="-120"/>
               </a:rPr>
-              <a:t>另外两个刻度</a:t>
+              <a:t>另外两项任务的配置差异</a:t>
             </a:r>
             <a:endParaRPr lang="en-US" sz="3200" dirty="0"/>
           </a:p>
@@ -29289,7 +29289,7 @@
                 <a:ea typeface="Microsoft YaHei" pitchFamily="34" charset="-122"/>
                 <a:cs typeface="Microsoft YaHei" pitchFamily="34" charset="-120"/>
               </a:rPr>
-              <a:t>AI 只在教师侧，学生一台设备都不碰。</a:t>
+              <a:t>AI 仅配置在教师侧，学生全程不使用设备。</a:t>
             </a:r>
             <a:endParaRPr lang="en-US" sz="1300" dirty="0"/>
           </a:p>
@@ -29331,7 +29331,7 @@
                 <a:ea typeface="Microsoft YaHei" pitchFamily="34" charset="-122"/>
                 <a:cs typeface="Microsoft YaHei" pitchFamily="34" charset="-120"/>
               </a:rPr>
-              <a:t>教师课前用智能体把校园可能遇到的物种、常见误认、有毒有刺植物的安全提示做成速查卡。学生用调查记录表和图鉴。</a:t>
+              <a:t>教师课前以智能体整理校园常见物种、易混淆种类与有毒有刺植物的安全提示，编成速查卡。学生使用调查记录表与图鉴。</a:t>
             </a:r>
             <a:endParaRPr lang="en-US" sz="1050" dirty="0"/>
           </a:p>
@@ -29503,7 +29503,7 @@
                 <a:ea typeface="Microsoft YaHei" pitchFamily="34" charset="-122"/>
                 <a:cs typeface="Microsoft YaHei" pitchFamily="34" charset="-120"/>
               </a:rPr>
-              <a:t>学生侧两端都开，配一个挑刺智能体。</a:t>
+              <a:t>学生侧两端均开放，另配一个提出质疑的智能体。</a:t>
             </a:r>
             <a:endParaRPr lang="en-US" sz="1300" dirty="0"/>
           </a:p>
@@ -29545,7 +29545,7 @@
                 <a:ea typeface="Microsoft YaHei" pitchFamily="34" charset="-122"/>
                 <a:cs typeface="Microsoft YaHei" pitchFamily="34" charset="-120"/>
               </a:rPr>
-              <a:t>沙盘分水的模拟探究环节 AI 一点都不进。学生自己用水槽、沙盘、矿泉水瓶试不同坝形对分水灌溉的影响。</a:t>
+              <a:t>沙盘分水的模拟探究环节完全不引入 AI。学生以水槽、沙盘与容器自行试验不同坝形对分水灌溉的影响。</a:t>
             </a:r>
             <a:endParaRPr lang="en-US" sz="1050" dirty="0"/>
           </a:p>
@@ -29610,7 +29610,7 @@
                 <a:ea typeface="Microsoft YaHei" pitchFamily="34" charset="-122"/>
                 <a:cs typeface="Microsoft YaHei" pitchFamily="34" charset="-120"/>
               </a:rPr>
-              <a:t>同一套判断，可以落成完全不同的刻度。</a:t>
+              <a:t>同一套判据，在不同任务上可以落成完全不同的配置。</a:t>
             </a:r>
             <a:endParaRPr lang="en-US" sz="1000" dirty="0"/>
           </a:p>
@@ -30054,7 +30054,7 @@
         <p:spPr>
           <a:xfrm>
             <a:off x="1295400" y="2468880"/>
-            <a:ext cx="9158935" cy="1737360"/>
+            <a:ext cx="9158935" cy="2286000"/>
           </a:xfrm>
           <a:prstGeom prst="rect">
             <a:avLst/>
@@ -30073,7 +30073,7 @@
               <a:buNone/>
             </a:pPr>
             <a:r>
-              <a:rPr lang="en-US" sz="2800" b="1" dirty="0">
+              <a:rPr lang="en-US" sz="2500" b="1" dirty="0">
                 <a:solidFill>
                   <a:srgbClr val="0F1B2D"/>
                 </a:solidFill>
@@ -30081,9 +30081,9 @@
                 <a:ea typeface="Microsoft YaHei" pitchFamily="34" charset="-122"/>
                 <a:cs typeface="Microsoft YaHei" pitchFamily="34" charset="-120"/>
               </a:rPr>
-              <a:t>任务链条越长、失败越可能发生的环节，AI 越往教师侧收；越接近传播和表达，越可以往学生侧放。</a:t>
-            </a:r>
-            <a:endParaRPr lang="en-US" sz="2800" dirty="0"/>
+              <a:t>任务链条中越可能发生失败的环节，AI 越应收向教师侧；越接近表达与传播的环节，越可以放向学生侧。</a:t>
+            </a:r>
+            <a:endParaRPr lang="en-US" sz="2500" dirty="0"/>
           </a:p>
         </p:txBody>
       </p:sp>
@@ -30549,7 +30549,7 @@
                 <a:ea typeface="Microsoft YaHei" pitchFamily="34" charset="-122"/>
                 <a:cs typeface="Microsoft YaHei" pitchFamily="34" charset="-120"/>
               </a:rPr>
-              <a:t>谁做的</a:t>
+              <a:t>作者身份的可验证性</a:t>
             </a:r>
             <a:endParaRPr lang="en-US" sz="1000" dirty="0"/>
           </a:p>
@@ -30564,7 +30564,7 @@
         <p:spPr>
           <a:xfrm>
             <a:off x="1295400" y="2615184"/>
-            <a:ext cx="9158935" cy="1737360"/>
+            <a:ext cx="9158935" cy="2286000"/>
           </a:xfrm>
           <a:prstGeom prst="rect">
             <a:avLst/>
@@ -30583,7 +30583,7 @@
               <a:buNone/>
             </a:pPr>
             <a:r>
-              <a:rPr lang="en-US" sz="2800" b="1" dirty="0">
+              <a:rPr lang="en-US" sz="2500" b="1" dirty="0">
                 <a:solidFill>
                   <a:srgbClr val="0F1B2D"/>
                 </a:solidFill>
@@ -30591,9 +30591,9 @@
                 <a:ea typeface="Microsoft YaHei" pitchFamily="34" charset="-122"/>
                 <a:cs typeface="Microsoft YaHei" pitchFamily="34" charset="-120"/>
               </a:rPr>
-              <a:t>AI 一进来，谁做的就不可验证，除非事先设计。</a:t>
-            </a:r>
-            <a:endParaRPr lang="en-US" sz="2800" dirty="0"/>
+              <a:t>生成式 AI 介入后，成果的作者身份不可事后验证，除非在任务设计阶段预先安排。</a:t>
+            </a:r>
+            <a:endParaRPr lang="en-US" sz="2500" dirty="0"/>
           </a:p>
         </p:txBody>
       </p:sp>
@@ -30605,7 +30605,7 @@
         </p:nvSpPr>
         <p:spPr>
           <a:xfrm>
-            <a:off x="1295400" y="3803904"/>
+            <a:off x="1295400" y="4078224"/>
             <a:ext cx="9158935" cy="365760"/>
           </a:xfrm>
           <a:prstGeom prst="rect">
@@ -30630,7 +30630,7 @@
                 <a:ea typeface="Microsoft YaHei" pitchFamily="34" charset="-122"/>
                 <a:cs typeface="Microsoft YaHei" pitchFamily="34" charset="-120"/>
               </a:rPr>
-              <a:t>事前配置比事后查重可靠。</a:t>
+              <a:t>事前配置的可靠性高于事后查重。</a:t>
             </a:r>
             <a:endParaRPr lang="en-US" sz="1500" dirty="0"/>
           </a:p>
@@ -31098,7 +31098,7 @@
                 <a:ea typeface="Microsoft YaHei" pitchFamily="34" charset="-122"/>
                 <a:cs typeface="Microsoft YaHei" pitchFamily="34" charset="-120"/>
               </a:rPr>
-              <a:t>第六段　·　证据、评价与红线</a:t>
+              <a:t>第六段　·　过程证据、评价与使用红线</a:t>
             </a:r>
             <a:endParaRPr lang="en-US" sz="1000" dirty="0"/>
           </a:p>
@@ -31137,7 +31137,7 @@
                 <a:ea typeface="Microsoft YaHei" pitchFamily="34" charset="-122"/>
                 <a:cs typeface="Microsoft YaHei" pitchFamily="34" charset="-120"/>
               </a:rPr>
-              <a:t>四栏留痕表</a:t>
+              <a:t>AI 使用留痕表</a:t>
             </a:r>
             <a:endParaRPr lang="en-US" sz="3200" dirty="0"/>
           </a:p>
@@ -31782,7 +31782,7 @@
                 <a:ea typeface="Microsoft YaHei" pitchFamily="34" charset="-122"/>
                 <a:cs typeface="Microsoft YaHei" pitchFamily="34" charset="-120"/>
               </a:rPr>
-              <a:t>第四栏直接就是反思改进能力的书面表现，不是额外负担。</a:t>
+              <a:t>第四栏即反思改进能力的书面表现，属于评价证据，不构成额外负担。</a:t>
             </a:r>
             <a:endParaRPr lang="en-US" sz="1000" dirty="0"/>
           </a:p>
@@ -32250,7 +32250,7 @@
                 <a:ea typeface="Microsoft YaHei" pitchFamily="34" charset="-122"/>
                 <a:cs typeface="Microsoft YaHei" pitchFamily="34" charset="-120"/>
               </a:rPr>
-              <a:t>第六段　·　证据、评价与红线</a:t>
+              <a:t>第六段　·　过程证据、评价与使用红线</a:t>
             </a:r>
             <a:endParaRPr lang="en-US" sz="1000" dirty="0"/>
           </a:p>
@@ -32289,7 +32289,7 @@
                 <a:ea typeface="Microsoft YaHei" pitchFamily="34" charset="-122"/>
                 <a:cs typeface="Microsoft YaHei" pitchFamily="34" charset="-120"/>
               </a:rPr>
-              <a:t>答辩三问</a:t>
+              <a:t>答辩环节的三项提问</a:t>
             </a:r>
             <a:endParaRPr lang="en-US" sz="3200" dirty="0"/>
           </a:p>
@@ -32445,7 +32445,7 @@
                 <a:ea typeface="Microsoft YaHei" pitchFamily="34" charset="-122"/>
                 <a:cs typeface="Microsoft YaHei" pitchFamily="34" charset="-120"/>
               </a:rPr>
-              <a:t>你把 AI 给的东西改了哪里</a:t>
+              <a:t>你对 AI 的输出作了哪些修改</a:t>
             </a:r>
             <a:endParaRPr lang="en-US" sz="2300" dirty="0"/>
           </a:p>
@@ -32523,7 +32523,7 @@
                 <a:ea typeface="Microsoft YaHei" pitchFamily="34" charset="-122"/>
                 <a:cs typeface="Microsoft YaHei" pitchFamily="34" charset="-120"/>
               </a:rPr>
-              <a:t>如果这里错了，你怎么发现</a:t>
+              <a:t>如果此处有误，你如何发现</a:t>
             </a:r>
             <a:endParaRPr lang="en-US" sz="2300" dirty="0"/>
           </a:p>
@@ -32588,7 +32588,7 @@
                 <a:ea typeface="Microsoft YaHei" pitchFamily="34" charset="-122"/>
                 <a:cs typeface="Microsoft YaHei" pitchFamily="34" charset="-120"/>
               </a:rPr>
-              <a:t>零成本，零技术门槛，明天就能用。</a:t>
+              <a:t>三项提问不依赖额外工具与准备，可在下一次答辩中直接使用。</a:t>
             </a:r>
             <a:endParaRPr lang="en-US" sz="1000" dirty="0"/>
           </a:p>
@@ -33056,7 +33056,7 @@
                 <a:ea typeface="Microsoft YaHei" pitchFamily="34" charset="-122"/>
                 <a:cs typeface="Microsoft YaHei" pitchFamily="34" charset="-120"/>
               </a:rPr>
-              <a:t>第六段　·　证据、评价与红线</a:t>
+              <a:t>第六段　·　过程证据、评价与使用红线</a:t>
             </a:r>
             <a:endParaRPr lang="en-US" sz="1000" dirty="0"/>
           </a:p>
@@ -33095,7 +33095,7 @@
                 <a:ea typeface="Microsoft YaHei" pitchFamily="34" charset="-122"/>
                 <a:cs typeface="Microsoft YaHei" pitchFamily="34" charset="-120"/>
               </a:rPr>
-              <a:t>证据到哪里去</a:t>
+              <a:t>过程证据的制度出口</a:t>
             </a:r>
             <a:endParaRPr lang="en-US" sz="3200" dirty="0"/>
           </a:p>
@@ -33626,7 +33626,7 @@
                 <a:ea typeface="Microsoft YaHei" pitchFamily="34" charset="-122"/>
                 <a:cs typeface="Microsoft YaHei" pitchFamily="34" charset="-120"/>
               </a:rPr>
-              <a:t>第六段　·　证据、评价与红线</a:t>
+              <a:t>第六段　·　过程证据、评价与使用红线</a:t>
             </a:r>
             <a:endParaRPr lang="en-US" sz="1000" dirty="0"/>
           </a:p>
@@ -33665,7 +33665,7 @@
                 <a:ea typeface="Microsoft YaHei" pitchFamily="34" charset="-122"/>
                 <a:cs typeface="Microsoft YaHei" pitchFamily="34" charset="-120"/>
               </a:rPr>
-              <a:t>红线</a:t>
+              <a:t>生成式 AI 的使用红线</a:t>
             </a:r>
             <a:endParaRPr lang="en-US" sz="3200" dirty="0"/>
           </a:p>
@@ -34769,7 +34769,7 @@
                 <a:ea typeface="Microsoft YaHei" pitchFamily="34" charset="-122"/>
                 <a:cs typeface="Microsoft YaHei" pitchFamily="34" charset="-120"/>
               </a:rPr>
-              <a:t>第六段　·　证据、评价与红线</a:t>
+              <a:t>第六段　·　过程证据、评价与使用红线</a:t>
             </a:r>
             <a:endParaRPr lang="en-US" sz="1000" dirty="0"/>
           </a:p>
@@ -34808,7 +34808,7 @@
                 <a:ea typeface="Microsoft YaHei" pitchFamily="34" charset="-122"/>
                 <a:cs typeface="Microsoft YaHei" pitchFamily="34" charset="-120"/>
               </a:rPr>
-              <a:t>签名在谁那里</a:t>
+              <a:t>评价主体与责任归属</a:t>
             </a:r>
             <a:endParaRPr lang="en-US" sz="3200" dirty="0"/>
           </a:p>
@@ -35735,7 +35735,7 @@
                 <a:ea typeface="Microsoft YaHei" pitchFamily="34" charset="-122"/>
                 <a:cs typeface="Microsoft YaHei" pitchFamily="34" charset="-120"/>
               </a:rPr>
-              <a:t>第七段　·　工具位置与下周三件事</a:t>
+              <a:t>第七段　·　工具定位与实施建议</a:t>
             </a:r>
             <a:endParaRPr lang="en-US" sz="1000" dirty="0"/>
           </a:p>
@@ -35774,7 +35774,7 @@
                 <a:ea typeface="Microsoft YaHei" pitchFamily="34" charset="-122"/>
                 <a:cs typeface="Microsoft YaHei" pitchFamily="34" charset="-120"/>
               </a:rPr>
-              <a:t>三类工具各自的位置</a:t>
+              <a:t>三类工具在任务中的位置</a:t>
             </a:r>
             <a:endParaRPr lang="en-US" sz="3200" dirty="0"/>
           </a:p>
@@ -36088,7 +36088,7 @@
                           <a:ea typeface="Microsoft YaHei" pitchFamily="34" charset="-122"/>
                           <a:cs typeface="Microsoft YaHei" pitchFamily="34" charset="-120"/>
                         </a:rPr>
-                        <a:t>方案挑刺、答辩预演、教师侧备课</a:t>
+                        <a:t>方案质疑、答辩预演、教师备课</a:t>
                       </a:r>
                       <a:endParaRPr lang="en-US" sz="1200" dirty="0">
                         <a:latin typeface="Microsoft YaHei" charset="0"/>
@@ -36362,7 +36362,7 @@
                           <a:ea typeface="Microsoft YaHei" pitchFamily="34" charset="-122"/>
                           <a:cs typeface="Microsoft YaHei" pitchFamily="34" charset="-120"/>
                         </a:rPr>
-                        <a:t>代替动手做</a:t>
+                        <a:t>替代动手实践</a:t>
                       </a:r>
                       <a:endParaRPr lang="en-US" sz="1200" dirty="0">
                         <a:latin typeface="Microsoft YaHei" charset="0"/>
@@ -36568,7 +36568,7 @@
                           <a:ea typeface="Microsoft YaHei" pitchFamily="34" charset="-122"/>
                           <a:cs typeface="Microsoft YaHei" pitchFamily="34" charset="-120"/>
                         </a:rPr>
-                        <a:t>代替教师判断</a:t>
+                        <a:t>替代教师判断</a:t>
                       </a:r>
                       <a:endParaRPr lang="en-US" sz="1200" dirty="0">
                         <a:latin typeface="Microsoft YaHei" charset="0"/>
@@ -36683,7 +36683,7 @@
                 <a:ea typeface="Microsoft YaHei" pitchFamily="34" charset="-122"/>
                 <a:cs typeface="Microsoft YaHei" pitchFamily="34" charset="-120"/>
               </a:rPr>
-              <a:t>智能体管过程，证据页管留痕和传播。</a:t>
+              <a:t>对话式工具承担过程支持，证据页承担留痕与对外发布。</a:t>
             </a:r>
             <a:endParaRPr lang="en-US" sz="1000" dirty="0"/>
           </a:p>
@@ -37151,7 +37151,7 @@
                 <a:ea typeface="Microsoft YaHei" pitchFamily="34" charset="-122"/>
                 <a:cs typeface="Microsoft YaHei" pitchFamily="34" charset="-120"/>
               </a:rPr>
-              <a:t>第一段　·　做中学补了这门课的哪一半</a:t>
+              <a:t>第一段　·　做中学对综合实践活动的覆盖范围</a:t>
             </a:r>
             <a:endParaRPr lang="en-US" sz="1000" dirty="0"/>
           </a:p>
@@ -37190,7 +37190,7 @@
                 <a:ea typeface="Microsoft YaHei" pitchFamily="34" charset="-122"/>
                 <a:cs typeface="Microsoft YaHei" pitchFamily="34" charset="-120"/>
               </a:rPr>
-              <a:t>这门课走到今天</a:t>
+              <a:t>综合实践活动的课程沿革</a:t>
             </a:r>
             <a:endParaRPr lang="en-US" sz="3200" dirty="0"/>
           </a:p>
@@ -37682,7 +37682,7 @@
                 <a:ea typeface="Microsoft YaHei" pitchFamily="34" charset="-122"/>
                 <a:cs typeface="Microsoft YaHei" pitchFamily="34" charset="-120"/>
               </a:rPr>
-              <a:t>第七段　·　工具位置与下周三件事</a:t>
+              <a:t>第七段　·　工具定位与实施建议</a:t>
             </a:r>
             <a:endParaRPr lang="en-US" sz="1000" dirty="0"/>
           </a:p>
@@ -37721,7 +37721,7 @@
                 <a:ea typeface="Microsoft YaHei" pitchFamily="34" charset="-122"/>
                 <a:cs typeface="Microsoft YaHei" pitchFamily="34" charset="-120"/>
               </a:rPr>
-              <a:t>下周三件事</a:t>
+              <a:t>可即时实施的三项动作</a:t>
             </a:r>
             <a:endParaRPr lang="en-US" sz="3200" dirty="0"/>
           </a:p>
@@ -37799,7 +37799,7 @@
                 <a:ea typeface="Microsoft YaHei" pitchFamily="34" charset="-122"/>
                 <a:cs typeface="Microsoft YaHei" pitchFamily="34" charset="-120"/>
               </a:rPr>
-              <a:t>建问题墙</a:t>
+              <a:t>设置问题墙</a:t>
             </a:r>
             <a:endParaRPr lang="en-US" sz="2000" dirty="0"/>
           </a:p>
@@ -37838,7 +37838,7 @@
                 <a:ea typeface="Microsoft YaHei" pitchFamily="34" charset="-122"/>
                 <a:cs typeface="Microsoft YaHei" pitchFamily="34" charset="-120"/>
               </a:rPr>
-              <a:t>学生一周内贴出三个真实困扰，教师挑一个打磨成驱动性问题。这一件不用 AI。</a:t>
+              <a:t>学生一周内提交三个真实困扰，教师选取一个打磨为驱动性问题。本项不使用 AI。</a:t>
             </a:r>
             <a:endParaRPr lang="en-US" sz="1150" dirty="0"/>
           </a:p>
@@ -37916,7 +37916,7 @@
                 <a:ea typeface="Microsoft YaHei" pitchFamily="34" charset="-122"/>
                 <a:cs typeface="Microsoft YaHei" pitchFamily="34" charset="-120"/>
               </a:rPr>
-              <a:t>做一个方案挑刺智能体</a:t>
+              <a:t>构建方案质疑智能体</a:t>
             </a:r>
             <a:endParaRPr lang="en-US" sz="2000" dirty="0"/>
           </a:p>
@@ -37955,7 +37955,7 @@
                 <a:ea typeface="Microsoft YaHei" pitchFamily="34" charset="-122"/>
                 <a:cs typeface="Microsoft YaHei" pitchFamily="34" charset="-120"/>
               </a:rPr>
-              <a:t>只提问，不给答案。学生先有方案，它才有得挑。</a:t>
+              <a:t>只提问，不作答。学生须先有方案，该工具才有质疑对象。</a:t>
             </a:r>
             <a:endParaRPr lang="en-US" sz="1150" dirty="0"/>
           </a:p>
@@ -38033,7 +38033,7 @@
                 <a:ea typeface="Microsoft YaHei" pitchFamily="34" charset="-122"/>
                 <a:cs typeface="Microsoft YaHei" pitchFamily="34" charset="-120"/>
               </a:rPr>
-              <a:t>做一页过程证据留痕</a:t>
+              <a:t>启用过程证据留痕</a:t>
             </a:r>
             <a:endParaRPr lang="en-US" sz="2000" dirty="0"/>
           </a:p>
@@ -38072,7 +38072,7 @@
                 <a:ea typeface="Microsoft YaHei" pitchFamily="34" charset="-122"/>
                 <a:cs typeface="Microsoft YaHei" pitchFamily="34" charset="-120"/>
               </a:rPr>
-              <a:t>四栏留痕表随任务单一起发，不等结题才补。</a:t>
+              <a:t>四栏留痕表随任务单一并发放，不在结题时补录。</a:t>
             </a:r>
             <a:endParaRPr lang="en-US" sz="1150" dirty="0"/>
           </a:p>
@@ -38137,7 +38137,7 @@
                 <a:ea typeface="Microsoft YaHei" pitchFamily="34" charset="-122"/>
                 <a:cs typeface="Microsoft YaHei" pitchFamily="34" charset="-120"/>
               </a:rPr>
-              <a:t>顺序不要调。第一件必须是非 AI 的。</a:t>
+              <a:t>三项动作存在先后依赖，第一项不涉及 AI。</a:t>
             </a:r>
             <a:endParaRPr lang="en-US" sz="1000" dirty="0"/>
           </a:p>
@@ -39265,7 +39265,7 @@
                 <a:ea typeface="Microsoft YaHei" pitchFamily="34" charset="-122"/>
                 <a:cs typeface="Microsoft YaHei" pitchFamily="34" charset="-120"/>
               </a:rPr>
-              <a:t>第一段　·　做中学补了这门课的哪一半</a:t>
+              <a:t>第一段　·　做中学对综合实践活动的覆盖范围</a:t>
             </a:r>
             <a:endParaRPr lang="en-US" sz="1000" dirty="0"/>
           </a:p>
@@ -40417,7 +40417,7 @@
                 <a:ea typeface="Microsoft YaHei" pitchFamily="34" charset="-122"/>
                 <a:cs typeface="Microsoft YaHei" pitchFamily="34" charset="-120"/>
               </a:rPr>
-              <a:t>第一段　·　做中学补了这门课的哪一半</a:t>
+              <a:t>第一段　·　做中学对综合实践活动的覆盖范围</a:t>
             </a:r>
             <a:endParaRPr lang="en-US" sz="1000" dirty="0"/>
           </a:p>
@@ -41701,7 +41701,7 @@
                 <a:ea typeface="Microsoft YaHei" pitchFamily="34" charset="-122"/>
                 <a:cs typeface="Microsoft YaHei" pitchFamily="34" charset="-120"/>
               </a:rPr>
-              <a:t>第一段　·　做中学补了这门课的哪一半</a:t>
+              <a:t>第一段　·　做中学对综合实践活动的覆盖范围</a:t>
             </a:r>
             <a:endParaRPr lang="en-US" sz="1000" dirty="0"/>
           </a:p>
@@ -41740,7 +41740,7 @@
                 <a:ea typeface="Microsoft YaHei" pitchFamily="34" charset="-122"/>
                 <a:cs typeface="Microsoft YaHei" pitchFamily="34" charset="-120"/>
               </a:rPr>
-              <a:t>覆盖关系</a:t>
+              <a:t>做中学对综合实践活动的覆盖关系</a:t>
             </a:r>
             <a:endParaRPr lang="en-US" sz="3200" dirty="0"/>
           </a:p>
@@ -42232,7 +42232,7 @@
                 <a:ea typeface="Microsoft YaHei" pitchFamily="34" charset="-122"/>
                 <a:cs typeface="Microsoft YaHei" pitchFamily="34" charset="-120"/>
               </a:rPr>
-              <a:t>两个缺口就是专业位置</a:t>
+              <a:t>本场主张</a:t>
             </a:r>
             <a:endParaRPr lang="en-US" sz="1000" dirty="0"/>
           </a:p>
@@ -42247,7 +42247,7 @@
         <p:spPr>
           <a:xfrm>
             <a:off x="1295400" y="2615184"/>
-            <a:ext cx="9158935" cy="1737360"/>
+            <a:ext cx="9158935" cy="2286000"/>
           </a:xfrm>
           <a:prstGeom prst="rect">
             <a:avLst/>
@@ -42266,7 +42266,7 @@
               <a:buNone/>
             </a:pPr>
             <a:r>
-              <a:rPr lang="en-US" sz="2800" b="1" dirty="0">
+              <a:rPr lang="en-US" sz="2500" b="1" dirty="0">
                 <a:solidFill>
                   <a:srgbClr val="0F1B2D"/>
                 </a:solidFill>
@@ -42274,9 +42274,9 @@
                 <a:ea typeface="Microsoft YaHei" pitchFamily="34" charset="-122"/>
                 <a:cs typeface="Microsoft YaHei" pitchFamily="34" charset="-120"/>
               </a:rPr>
-              <a:t>AI 不是解决这门课问题的工具，它是一个会同时放大两端的变量。这门课原有的病灶正好是 AI 最容易加剧的地方，原有的负担正好是 AI 最容易减轻的地方。</a:t>
-            </a:r>
-            <a:endParaRPr lang="en-US" sz="2800" dirty="0"/>
+              <a:t>生成式 AI 并非解决本课程既有问题的工具，而是一个同时放大两端的变量。本课程既有的实施问题，恰是 AI 最容易加剧的部分；既有的教师负担，恰是 AI 最容易减轻的部分。</a:t>
+            </a:r>
+            <a:endParaRPr lang="en-US" sz="2500" dirty="0"/>
           </a:p>
         </p:txBody>
       </p:sp>
@@ -42742,7 +42742,7 @@
                 <a:ea typeface="Microsoft YaHei" pitchFamily="34" charset="-122"/>
                 <a:cs typeface="Microsoft YaHei" pitchFamily="34" charset="-120"/>
               </a:rPr>
-              <a:t>第二段　·　成果不可信之后，专业位置在哪里</a:t>
+              <a:t>第二段　·　成果可替代性与教师的专业位置</a:t>
             </a:r>
             <a:endParaRPr lang="en-US" sz="1000" dirty="0"/>
           </a:p>
@@ -42781,7 +42781,7 @@
                 <a:ea typeface="Microsoft YaHei" pitchFamily="34" charset="-122"/>
                 <a:cs typeface="Microsoft YaHei" pitchFamily="34" charset="-120"/>
               </a:rPr>
-              <a:t>哪一份是学生自己做的</a:t>
+              <a:t>两份研究方案的辨识</a:t>
             </a:r>
             <a:endParaRPr lang="en-US" sz="3200" dirty="0"/>
           </a:p>
@@ -43276,7 +43276,7 @@
                 <a:ea typeface="Microsoft YaHei" pitchFamily="34" charset="-122"/>
                 <a:cs typeface="Microsoft YaHei" pitchFamily="34" charset="-120"/>
               </a:rPr>
-              <a:t>举手：认为甲是学生自己做的，请举手。</a:t>
+              <a:t>请判断：哪一份出自学生本人。</a:t>
             </a:r>
             <a:endParaRPr lang="en-US" sz="1500" dirty="0"/>
           </a:p>
